--- a/pptx_sessions_8_22/第21回_応用編_受講者用.pptx
+++ b/pptx_sessions_8_22/第21回_応用編_受講者用.pptx
@@ -1527,7 +1527,9 @@
           </a:ln>
         </p:spPr>
         <p:txBody>
-          <a:bodyPr/>
+          <a:bodyPr wrap="square">
+            <a:normAutofit/>
+          </a:bodyPr>
           <a:p/>
         </p:txBody>
       </p:sp>
@@ -1556,7 +1558,9 @@
           </a:ln>
         </p:spPr>
         <p:txBody>
-          <a:bodyPr/>
+          <a:bodyPr wrap="square">
+            <a:normAutofit/>
+          </a:bodyPr>
           <a:p/>
         </p:txBody>
       </p:sp>
@@ -1578,7 +1582,9 @@
           <a:ln/>
         </p:spPr>
         <p:txBody>
-          <a:bodyPr wrap="square" rtlCol="0" anchor="ctr"/>
+          <a:bodyPr wrap="square" rtlCol="0" anchor="ctr">
+            <a:normAutofit/>
+          </a:bodyPr>
           <a:lstStyle/>
           <a:p>
             <a:pPr algn="ctr" indent="0" marL="0">
@@ -1617,7 +1623,9 @@
           <a:ln/>
         </p:spPr>
         <p:txBody>
-          <a:bodyPr wrap="square" rtlCol="0" anchor="ctr"/>
+          <a:bodyPr wrap="square" rtlCol="0" anchor="ctr">
+            <a:normAutofit/>
+          </a:bodyPr>
           <a:lstStyle/>
           <a:p>
             <a:pPr algn="ctr" indent="0" marL="0">
@@ -1656,7 +1664,9 @@
           <a:ln/>
         </p:spPr>
         <p:txBody>
-          <a:bodyPr wrap="square" rtlCol="0" anchor="ctr"/>
+          <a:bodyPr wrap="square" rtlCol="0" anchor="ctr">
+            <a:normAutofit/>
+          </a:bodyPr>
           <a:lstStyle/>
           <a:p>
             <a:pPr algn="ctr" indent="0" marL="0">
@@ -1695,7 +1705,9 @@
           <a:ln/>
         </p:spPr>
         <p:txBody>
-          <a:bodyPr wrap="square" rtlCol="0" anchor="ctr"/>
+          <a:bodyPr wrap="square" rtlCol="0" anchor="ctr">
+            <a:normAutofit/>
+          </a:bodyPr>
           <a:lstStyle/>
           <a:p>
             <a:pPr algn="ctr" indent="0" marL="0">
@@ -1743,7 +1755,9 @@
           </a:ln>
         </p:spPr>
         <p:txBody>
-          <a:bodyPr/>
+          <a:bodyPr wrap="square">
+            <a:normAutofit/>
+          </a:bodyPr>
           <a:p/>
         </p:txBody>
       </p:sp>
@@ -1765,7 +1779,9 @@
           <a:ln/>
         </p:spPr>
         <p:txBody>
-          <a:bodyPr wrap="square" rtlCol="0" anchor="ctr"/>
+          <a:bodyPr wrap="square" rtlCol="0" anchor="ctr">
+            <a:normAutofit/>
+          </a:bodyPr>
           <a:lstStyle/>
           <a:p>
             <a:pPr algn="ctr" indent="0" marL="0">
@@ -1836,7 +1852,9 @@
           </a:ln>
         </p:spPr>
         <p:txBody>
-          <a:bodyPr/>
+          <a:bodyPr wrap="square">
+            <a:normAutofit/>
+          </a:bodyPr>
           <a:p/>
         </p:txBody>
       </p:sp>
@@ -1865,7 +1883,9 @@
           </a:ln>
         </p:spPr>
         <p:txBody>
-          <a:bodyPr/>
+          <a:bodyPr wrap="square">
+            <a:normAutofit/>
+          </a:bodyPr>
           <a:p/>
         </p:txBody>
       </p:sp>
@@ -1887,7 +1907,9 @@
           <a:ln/>
         </p:spPr>
         <p:txBody>
-          <a:bodyPr wrap="square" rtlCol="0" anchor="ctr"/>
+          <a:bodyPr wrap="square" rtlCol="0" anchor="ctr">
+            <a:normAutofit/>
+          </a:bodyPr>
           <a:lstStyle/>
           <a:p>
             <a:pPr indent="0" marL="0">
@@ -1926,7 +1948,9 @@
           <a:ln/>
         </p:spPr>
         <p:txBody>
-          <a:bodyPr wrap="square" rtlCol="0" anchor="ctr"/>
+          <a:bodyPr wrap="square" rtlCol="0" anchor="ctr">
+            <a:normAutofit/>
+          </a:bodyPr>
           <a:lstStyle/>
           <a:p>
             <a:pPr indent="0" marL="0">
@@ -1974,7 +1998,9 @@
           </a:ln>
         </p:spPr>
         <p:txBody>
-          <a:bodyPr/>
+          <a:bodyPr wrap="square">
+            <a:normAutofit/>
+          </a:bodyPr>
           <a:p/>
         </p:txBody>
       </p:sp>
@@ -1996,7 +2022,9 @@
           <a:ln/>
         </p:spPr>
         <p:txBody>
-          <a:bodyPr wrap="square" rtlCol="0" anchor="ctr"/>
+          <a:bodyPr wrap="square" rtlCol="0" anchor="ctr">
+            <a:normAutofit/>
+          </a:bodyPr>
           <a:lstStyle/>
           <a:p>
             <a:pPr indent="0" marL="0">
@@ -2035,7 +2063,9 @@
           <a:ln/>
         </p:spPr>
         <p:txBody>
-          <a:bodyPr wrap="square" rtlCol="0" anchor="ctr"/>
+          <a:bodyPr wrap="square" rtlCol="0" anchor="ctr">
+            <a:normAutofit/>
+          </a:bodyPr>
           <a:lstStyle/>
           <a:p>
             <a:pPr indent="0" marL="0">
@@ -2074,7 +2104,9 @@
           <a:ln/>
         </p:spPr>
         <p:txBody>
-          <a:bodyPr wrap="square" rtlCol="0" anchor="ctr"/>
+          <a:bodyPr wrap="square" rtlCol="0" anchor="ctr">
+            <a:normAutofit/>
+          </a:bodyPr>
           <a:lstStyle/>
           <a:p>
             <a:pPr indent="0" marL="0">
@@ -2122,7 +2154,9 @@
           </a:ln>
         </p:spPr>
         <p:txBody>
-          <a:bodyPr/>
+          <a:bodyPr wrap="square">
+            <a:normAutofit/>
+          </a:bodyPr>
           <a:p/>
         </p:txBody>
       </p:sp>
@@ -2144,7 +2178,9 @@
           <a:ln/>
         </p:spPr>
         <p:txBody>
-          <a:bodyPr wrap="square" rtlCol="0" anchor="ctr"/>
+          <a:bodyPr wrap="square" rtlCol="0" anchor="ctr">
+            <a:normAutofit/>
+          </a:bodyPr>
           <a:lstStyle/>
           <a:p>
             <a:pPr indent="0" marL="0">
@@ -2183,7 +2219,9 @@
           <a:ln/>
         </p:spPr>
         <p:txBody>
-          <a:bodyPr wrap="square" rtlCol="0" anchor="ctr"/>
+          <a:bodyPr wrap="square" rtlCol="0" anchor="ctr">
+            <a:normAutofit/>
+          </a:bodyPr>
           <a:lstStyle/>
           <a:p>
             <a:pPr indent="0" marL="0">
@@ -2222,7 +2260,9 @@
           <a:ln/>
         </p:spPr>
         <p:txBody>
-          <a:bodyPr wrap="square" rtlCol="0" anchor="ctr"/>
+          <a:bodyPr wrap="square" rtlCol="0" anchor="ctr">
+            <a:normAutofit/>
+          </a:bodyPr>
           <a:lstStyle/>
           <a:p>
             <a:pPr indent="0" marL="0">
@@ -2270,7 +2310,9 @@
           </a:ln>
         </p:spPr>
         <p:txBody>
-          <a:bodyPr/>
+          <a:bodyPr wrap="square">
+            <a:normAutofit/>
+          </a:bodyPr>
           <a:p/>
         </p:txBody>
       </p:sp>
@@ -2292,7 +2334,9 @@
           <a:ln/>
         </p:spPr>
         <p:txBody>
-          <a:bodyPr wrap="square" rtlCol="0" anchor="ctr"/>
+          <a:bodyPr wrap="square" rtlCol="0" anchor="ctr">
+            <a:normAutofit/>
+          </a:bodyPr>
           <a:lstStyle/>
           <a:p>
             <a:pPr indent="0" marL="0">
@@ -2331,7 +2375,9 @@
           <a:ln/>
         </p:spPr>
         <p:txBody>
-          <a:bodyPr wrap="square" rtlCol="0" anchor="ctr"/>
+          <a:bodyPr wrap="square" rtlCol="0" anchor="ctr">
+            <a:normAutofit/>
+          </a:bodyPr>
           <a:lstStyle/>
           <a:p>
             <a:pPr indent="0" marL="0">
@@ -2370,7 +2416,9 @@
           <a:ln/>
         </p:spPr>
         <p:txBody>
-          <a:bodyPr wrap="square" rtlCol="0" anchor="ctr"/>
+          <a:bodyPr wrap="square" rtlCol="0" anchor="ctr">
+            <a:normAutofit/>
+          </a:bodyPr>
           <a:lstStyle/>
           <a:p>
             <a:pPr indent="0" marL="0">
@@ -2409,7 +2457,9 @@
           <a:ln/>
         </p:spPr>
         <p:txBody>
-          <a:bodyPr wrap="square" rtlCol="0" anchor="ctr"/>
+          <a:bodyPr wrap="square" rtlCol="0" anchor="ctr">
+            <a:normAutofit/>
+          </a:bodyPr>
           <a:lstStyle/>
           <a:p>
             <a:pPr algn="r" indent="0" marL="0">
@@ -2480,7 +2530,9 @@
           </a:ln>
         </p:spPr>
         <p:txBody>
-          <a:bodyPr/>
+          <a:bodyPr wrap="square">
+            <a:normAutofit/>
+          </a:bodyPr>
           <a:p/>
         </p:txBody>
       </p:sp>
@@ -2509,7 +2561,9 @@
           </a:ln>
         </p:spPr>
         <p:txBody>
-          <a:bodyPr/>
+          <a:bodyPr wrap="square">
+            <a:normAutofit/>
+          </a:bodyPr>
           <a:p/>
         </p:txBody>
       </p:sp>
@@ -2531,7 +2585,9 @@
           <a:ln/>
         </p:spPr>
         <p:txBody>
-          <a:bodyPr wrap="square" rtlCol="0" anchor="ctr"/>
+          <a:bodyPr wrap="square" rtlCol="0" anchor="ctr">
+            <a:normAutofit/>
+          </a:bodyPr>
           <a:lstStyle/>
           <a:p>
             <a:pPr indent="0" marL="0">
@@ -2570,7 +2626,9 @@
           <a:ln/>
         </p:spPr>
         <p:txBody>
-          <a:bodyPr wrap="square" rtlCol="0" anchor="ctr"/>
+          <a:bodyPr wrap="square" rtlCol="0" anchor="ctr">
+            <a:normAutofit/>
+          </a:bodyPr>
           <a:lstStyle/>
           <a:p>
             <a:pPr indent="0" marL="0">
@@ -2616,7 +2674,9 @@
           </a:ln>
         </p:spPr>
         <p:txBody>
-          <a:bodyPr/>
+          <a:bodyPr wrap="square">
+            <a:normAutofit/>
+          </a:bodyPr>
           <a:p/>
         </p:txBody>
       </p:sp>
@@ -2647,7 +2707,9 @@
           </a:ln>
         </p:spPr>
         <p:txBody>
-          <a:bodyPr/>
+          <a:bodyPr wrap="square">
+            <a:normAutofit/>
+          </a:bodyPr>
           <a:p/>
         </p:txBody>
       </p:sp>
@@ -2669,7 +2731,9 @@
           <a:ln/>
         </p:spPr>
         <p:txBody>
-          <a:bodyPr wrap="square" rtlCol="0" anchor="ctr"/>
+          <a:bodyPr wrap="square" rtlCol="0" anchor="ctr">
+            <a:normAutofit/>
+          </a:bodyPr>
           <a:lstStyle/>
           <a:p>
             <a:pPr algn="ctr" indent="0" marL="0">
@@ -2708,7 +2772,9 @@
           <a:ln/>
         </p:spPr>
         <p:txBody>
-          <a:bodyPr wrap="square" rtlCol="0" anchor="ctr"/>
+          <a:bodyPr wrap="square" rtlCol="0" anchor="ctr">
+            <a:normAutofit/>
+          </a:bodyPr>
           <a:lstStyle/>
           <a:p>
             <a:pPr indent="0" marL="0">
@@ -2754,7 +2820,9 @@
           </a:ln>
         </p:spPr>
         <p:txBody>
-          <a:bodyPr/>
+          <a:bodyPr wrap="square">
+            <a:normAutofit/>
+          </a:bodyPr>
           <a:p/>
         </p:txBody>
       </p:sp>
@@ -2785,7 +2853,9 @@
           </a:ln>
         </p:spPr>
         <p:txBody>
-          <a:bodyPr/>
+          <a:bodyPr wrap="square">
+            <a:normAutofit/>
+          </a:bodyPr>
           <a:p/>
         </p:txBody>
       </p:sp>
@@ -2807,7 +2877,9 @@
           <a:ln/>
         </p:spPr>
         <p:txBody>
-          <a:bodyPr wrap="square" rtlCol="0" anchor="ctr"/>
+          <a:bodyPr wrap="square" rtlCol="0" anchor="ctr">
+            <a:normAutofit/>
+          </a:bodyPr>
           <a:lstStyle/>
           <a:p>
             <a:pPr algn="ctr" indent="0" marL="0">
@@ -2846,7 +2918,9 @@
           <a:ln/>
         </p:spPr>
         <p:txBody>
-          <a:bodyPr wrap="square" rtlCol="0" anchor="ctr"/>
+          <a:bodyPr wrap="square" rtlCol="0" anchor="ctr">
+            <a:normAutofit/>
+          </a:bodyPr>
           <a:lstStyle/>
           <a:p>
             <a:pPr indent="0" marL="0">
@@ -2885,7 +2959,9 @@
           <a:ln/>
         </p:spPr>
         <p:txBody>
-          <a:bodyPr wrap="square" rtlCol="0" anchor="ctr"/>
+          <a:bodyPr wrap="square" rtlCol="0" anchor="ctr">
+            <a:normAutofit/>
+          </a:bodyPr>
           <a:lstStyle/>
           <a:p>
             <a:pPr indent="0" marL="0">
@@ -2933,7 +3009,9 @@
           </a:ln>
         </p:spPr>
         <p:txBody>
-          <a:bodyPr/>
+          <a:bodyPr wrap="square">
+            <a:normAutofit/>
+          </a:bodyPr>
           <a:p/>
         </p:txBody>
       </p:sp>
@@ -2964,7 +3042,9 @@
           </a:ln>
         </p:spPr>
         <p:txBody>
-          <a:bodyPr/>
+          <a:bodyPr wrap="square">
+            <a:normAutofit/>
+          </a:bodyPr>
           <a:p/>
         </p:txBody>
       </p:sp>
@@ -2986,7 +3066,9 @@
           <a:ln/>
         </p:spPr>
         <p:txBody>
-          <a:bodyPr wrap="square" rtlCol="0" anchor="ctr"/>
+          <a:bodyPr wrap="square" rtlCol="0" anchor="ctr">
+            <a:normAutofit/>
+          </a:bodyPr>
           <a:lstStyle/>
           <a:p>
             <a:pPr algn="ctr" indent="0" marL="0">
@@ -3025,7 +3107,9 @@
           <a:ln/>
         </p:spPr>
         <p:txBody>
-          <a:bodyPr wrap="square" rtlCol="0" anchor="ctr"/>
+          <a:bodyPr wrap="square" rtlCol="0" anchor="ctr">
+            <a:normAutofit/>
+          </a:bodyPr>
           <a:lstStyle/>
           <a:p>
             <a:pPr indent="0" marL="0">
@@ -3073,7 +3157,9 @@
           </a:ln>
         </p:spPr>
         <p:txBody>
-          <a:bodyPr/>
+          <a:bodyPr wrap="square">
+            <a:normAutofit/>
+          </a:bodyPr>
           <a:p/>
         </p:txBody>
       </p:sp>
@@ -3104,7 +3190,9 @@
           </a:ln>
         </p:spPr>
         <p:txBody>
-          <a:bodyPr/>
+          <a:bodyPr wrap="square">
+            <a:normAutofit/>
+          </a:bodyPr>
           <a:p/>
         </p:txBody>
       </p:sp>
@@ -3126,7 +3214,9 @@
           <a:ln/>
         </p:spPr>
         <p:txBody>
-          <a:bodyPr wrap="square" rtlCol="0" anchor="ctr"/>
+          <a:bodyPr wrap="square" rtlCol="0" anchor="ctr">
+            <a:normAutofit/>
+          </a:bodyPr>
           <a:lstStyle/>
           <a:p>
             <a:pPr algn="ctr" indent="0" marL="0">
@@ -3165,7 +3255,9 @@
           <a:ln/>
         </p:spPr>
         <p:txBody>
-          <a:bodyPr wrap="square" rtlCol="0" anchor="ctr"/>
+          <a:bodyPr wrap="square" rtlCol="0" anchor="ctr">
+            <a:normAutofit/>
+          </a:bodyPr>
           <a:lstStyle/>
           <a:p>
             <a:pPr indent="0" marL="0">
@@ -3213,7 +3305,9 @@
           </a:ln>
         </p:spPr>
         <p:txBody>
-          <a:bodyPr/>
+          <a:bodyPr wrap="square">
+            <a:normAutofit/>
+          </a:bodyPr>
           <a:p/>
         </p:txBody>
       </p:sp>
@@ -3244,7 +3338,9 @@
           </a:ln>
         </p:spPr>
         <p:txBody>
-          <a:bodyPr/>
+          <a:bodyPr wrap="square">
+            <a:normAutofit/>
+          </a:bodyPr>
           <a:p/>
         </p:txBody>
       </p:sp>
@@ -3266,7 +3362,9 @@
           <a:ln/>
         </p:spPr>
         <p:txBody>
-          <a:bodyPr wrap="square" rtlCol="0" anchor="ctr"/>
+          <a:bodyPr wrap="square" rtlCol="0" anchor="ctr">
+            <a:normAutofit/>
+          </a:bodyPr>
           <a:lstStyle/>
           <a:p>
             <a:pPr algn="ctr" indent="0" marL="0">
@@ -3305,7 +3403,9 @@
           <a:ln/>
         </p:spPr>
         <p:txBody>
-          <a:bodyPr wrap="square" rtlCol="0" anchor="ctr"/>
+          <a:bodyPr wrap="square" rtlCol="0" anchor="ctr">
+            <a:normAutofit/>
+          </a:bodyPr>
           <a:lstStyle/>
           <a:p>
             <a:pPr indent="0" marL="0">
@@ -3353,7 +3453,9 @@
           </a:ln>
         </p:spPr>
         <p:txBody>
-          <a:bodyPr/>
+          <a:bodyPr wrap="square">
+            <a:normAutofit/>
+          </a:bodyPr>
           <a:p/>
         </p:txBody>
       </p:sp>
@@ -3384,7 +3486,9 @@
           </a:ln>
         </p:spPr>
         <p:txBody>
-          <a:bodyPr/>
+          <a:bodyPr wrap="square">
+            <a:normAutofit/>
+          </a:bodyPr>
           <a:p/>
         </p:txBody>
       </p:sp>
@@ -3406,7 +3510,9 @@
           <a:ln/>
         </p:spPr>
         <p:txBody>
-          <a:bodyPr wrap="square" rtlCol="0" anchor="ctr"/>
+          <a:bodyPr wrap="square" rtlCol="0" anchor="ctr">
+            <a:normAutofit/>
+          </a:bodyPr>
           <a:lstStyle/>
           <a:p>
             <a:pPr algn="ctr" indent="0" marL="0">
@@ -3445,7 +3551,9 @@
           <a:ln/>
         </p:spPr>
         <p:txBody>
-          <a:bodyPr wrap="square" rtlCol="0" anchor="ctr"/>
+          <a:bodyPr wrap="square" rtlCol="0" anchor="ctr">
+            <a:normAutofit/>
+          </a:bodyPr>
           <a:lstStyle/>
           <a:p>
             <a:pPr indent="0" marL="0">
@@ -3484,7 +3592,9 @@
           <a:ln/>
         </p:spPr>
         <p:txBody>
-          <a:bodyPr wrap="square" rtlCol="0" anchor="ctr"/>
+          <a:bodyPr wrap="square" rtlCol="0" anchor="ctr">
+            <a:normAutofit/>
+          </a:bodyPr>
           <a:lstStyle/>
           <a:p>
             <a:pPr algn="r" indent="0" marL="0">
@@ -3555,7 +3665,9 @@
           </a:ln>
         </p:spPr>
         <p:txBody>
-          <a:bodyPr/>
+          <a:bodyPr wrap="square">
+            <a:normAutofit/>
+          </a:bodyPr>
           <a:p/>
         </p:txBody>
       </p:sp>
@@ -3584,7 +3696,9 @@
           </a:ln>
         </p:spPr>
         <p:txBody>
-          <a:bodyPr/>
+          <a:bodyPr wrap="square">
+            <a:normAutofit/>
+          </a:bodyPr>
           <a:p/>
         </p:txBody>
       </p:sp>
@@ -3615,7 +3729,9 @@
           </a:ln>
         </p:spPr>
         <p:txBody>
-          <a:bodyPr/>
+          <a:bodyPr wrap="square">
+            <a:normAutofit/>
+          </a:bodyPr>
           <a:p/>
         </p:txBody>
       </p:sp>
@@ -3637,7 +3753,9 @@
           <a:ln/>
         </p:spPr>
         <p:txBody>
-          <a:bodyPr wrap="square" rtlCol="0" anchor="ctr"/>
+          <a:bodyPr wrap="square" rtlCol="0" anchor="ctr">
+            <a:normAutofit/>
+          </a:bodyPr>
           <a:lstStyle/>
           <a:p>
             <a:pPr algn="ctr" indent="0" marL="0">
@@ -3676,7 +3794,9 @@
           <a:ln/>
         </p:spPr>
         <p:txBody>
-          <a:bodyPr wrap="square" rtlCol="0" anchor="ctr"/>
+          <a:bodyPr wrap="square" rtlCol="0" anchor="ctr">
+            <a:normAutofit/>
+          </a:bodyPr>
           <a:lstStyle/>
           <a:p>
             <a:pPr indent="0" marL="0">
@@ -3715,7 +3835,9 @@
           <a:ln/>
         </p:spPr>
         <p:txBody>
-          <a:bodyPr wrap="square" rtlCol="0" anchor="ctr"/>
+          <a:bodyPr wrap="square" rtlCol="0" anchor="ctr">
+            <a:normAutofit/>
+          </a:bodyPr>
           <a:lstStyle/>
           <a:p>
             <a:pPr indent="0" marL="0">
@@ -3763,7 +3885,9 @@
           </a:ln>
         </p:spPr>
         <p:txBody>
-          <a:bodyPr/>
+          <a:bodyPr wrap="square">
+            <a:normAutofit/>
+          </a:bodyPr>
           <a:p/>
         </p:txBody>
       </p:sp>
@@ -3785,7 +3909,9 @@
           <a:ln/>
         </p:spPr>
         <p:txBody>
-          <a:bodyPr wrap="square" rtlCol="0" anchor="ctr"/>
+          <a:bodyPr wrap="square" rtlCol="0" anchor="ctr">
+            <a:normAutofit/>
+          </a:bodyPr>
           <a:lstStyle/>
           <a:p>
             <a:pPr indent="0" marL="0">
@@ -3824,7 +3950,9 @@
           <a:ln/>
         </p:spPr>
         <p:txBody>
-          <a:bodyPr wrap="square" rtlCol="0" anchor="t"/>
+          <a:bodyPr wrap="square" rtlCol="0" anchor="t">
+            <a:normAutofit/>
+          </a:bodyPr>
           <a:lstStyle/>
           <a:p>
             <a:pPr indent="0" marL="0">
@@ -4008,7 +4136,9 @@
           </a:ln>
         </p:spPr>
         <p:txBody>
-          <a:bodyPr/>
+          <a:bodyPr wrap="square">
+            <a:normAutofit/>
+          </a:bodyPr>
           <a:p/>
         </p:txBody>
       </p:sp>
@@ -4030,7 +4160,9 @@
           <a:ln/>
         </p:spPr>
         <p:txBody>
-          <a:bodyPr wrap="square" rtlCol="0" anchor="ctr"/>
+          <a:bodyPr wrap="square" rtlCol="0" anchor="ctr">
+            <a:normAutofit/>
+          </a:bodyPr>
           <a:lstStyle/>
           <a:p>
             <a:pPr indent="0" marL="0">
@@ -4069,7 +4201,9 @@
           <a:ln/>
         </p:spPr>
         <p:txBody>
-          <a:bodyPr wrap="square" rtlCol="0" anchor="t"/>
+          <a:bodyPr wrap="square" rtlCol="0" anchor="t">
+            <a:normAutofit/>
+          </a:bodyPr>
           <a:lstStyle/>
           <a:p>
             <a:pPr indent="0" marL="0">
@@ -4244,7 +4378,9 @@
           <a:ln/>
         </p:spPr>
         <p:txBody>
-          <a:bodyPr wrap="square" rtlCol="0" anchor="ctr"/>
+          <a:bodyPr wrap="square" rtlCol="0" anchor="ctr">
+            <a:normAutofit/>
+          </a:bodyPr>
           <a:lstStyle/>
           <a:p>
             <a:pPr algn="r" indent="0" marL="0">
@@ -4315,7 +4451,9 @@
           </a:ln>
         </p:spPr>
         <p:txBody>
-          <a:bodyPr/>
+          <a:bodyPr wrap="square">
+            <a:normAutofit/>
+          </a:bodyPr>
           <a:p/>
         </p:txBody>
       </p:sp>
@@ -4344,7 +4482,9 @@
           </a:ln>
         </p:spPr>
         <p:txBody>
-          <a:bodyPr/>
+          <a:bodyPr wrap="square">
+            <a:normAutofit/>
+          </a:bodyPr>
           <a:p/>
         </p:txBody>
       </p:sp>
@@ -4375,7 +4515,9 @@
           </a:ln>
         </p:spPr>
         <p:txBody>
-          <a:bodyPr/>
+          <a:bodyPr wrap="square">
+            <a:normAutofit/>
+          </a:bodyPr>
           <a:p/>
         </p:txBody>
       </p:sp>
@@ -4397,7 +4539,9 @@
           <a:ln/>
         </p:spPr>
         <p:txBody>
-          <a:bodyPr wrap="square" rtlCol="0" anchor="ctr"/>
+          <a:bodyPr wrap="square" rtlCol="0" anchor="ctr">
+            <a:normAutofit/>
+          </a:bodyPr>
           <a:lstStyle/>
           <a:p>
             <a:pPr algn="ctr" indent="0" marL="0">
@@ -4436,7 +4580,9 @@
           <a:ln/>
         </p:spPr>
         <p:txBody>
-          <a:bodyPr wrap="square" rtlCol="0" anchor="ctr"/>
+          <a:bodyPr wrap="square" rtlCol="0" anchor="ctr">
+            <a:normAutofit/>
+          </a:bodyPr>
           <a:lstStyle/>
           <a:p>
             <a:pPr indent="0" marL="0">
@@ -4475,7 +4621,9 @@
           <a:ln/>
         </p:spPr>
         <p:txBody>
-          <a:bodyPr wrap="square" rtlCol="0" anchor="ctr"/>
+          <a:bodyPr wrap="square" rtlCol="0" anchor="ctr">
+            <a:normAutofit/>
+          </a:bodyPr>
           <a:lstStyle/>
           <a:p>
             <a:pPr indent="0" marL="0">
@@ -4523,7 +4671,9 @@
           </a:ln>
         </p:spPr>
         <p:txBody>
-          <a:bodyPr/>
+          <a:bodyPr wrap="square">
+            <a:normAutofit/>
+          </a:bodyPr>
           <a:p/>
         </p:txBody>
       </p:sp>
@@ -4545,7 +4695,9 @@
           <a:ln/>
         </p:spPr>
         <p:txBody>
-          <a:bodyPr wrap="square" rtlCol="0" anchor="ctr"/>
+          <a:bodyPr wrap="square" rtlCol="0" anchor="ctr">
+            <a:normAutofit/>
+          </a:bodyPr>
           <a:lstStyle/>
           <a:p>
             <a:pPr indent="0" marL="0">
@@ -4584,7 +4736,9 @@
           <a:ln/>
         </p:spPr>
         <p:txBody>
-          <a:bodyPr wrap="square" rtlCol="0" anchor="ctr"/>
+          <a:bodyPr wrap="square" rtlCol="0" anchor="ctr">
+            <a:normAutofit/>
+          </a:bodyPr>
           <a:lstStyle/>
           <a:p>
             <a:pPr indent="0" marL="0">
@@ -4623,7 +4777,9 @@
           <a:ln/>
         </p:spPr>
         <p:txBody>
-          <a:bodyPr wrap="square" rtlCol="0" anchor="t"/>
+          <a:bodyPr wrap="square" rtlCol="0" anchor="t">
+            <a:normAutofit/>
+          </a:bodyPr>
           <a:lstStyle/>
           <a:p>
             <a:pPr indent="0" marL="0">
@@ -4662,7 +4818,9 @@
           <a:ln/>
         </p:spPr>
         <p:txBody>
-          <a:bodyPr wrap="square" rtlCol="0" anchor="ctr"/>
+          <a:bodyPr wrap="square" rtlCol="0" anchor="ctr">
+            <a:normAutofit/>
+          </a:bodyPr>
           <a:lstStyle/>
           <a:p>
             <a:pPr indent="0" marL="0">
@@ -4701,7 +4859,9 @@
           <a:ln/>
         </p:spPr>
         <p:txBody>
-          <a:bodyPr wrap="square" rtlCol="0" anchor="t"/>
+          <a:bodyPr wrap="square" rtlCol="0" anchor="t">
+            <a:normAutofit/>
+          </a:bodyPr>
           <a:lstStyle/>
           <a:p>
             <a:pPr indent="0" marL="0">
@@ -4740,7 +4900,9 @@
           <a:ln/>
         </p:spPr>
         <p:txBody>
-          <a:bodyPr wrap="square" rtlCol="0" anchor="ctr"/>
+          <a:bodyPr wrap="square" rtlCol="0" anchor="ctr">
+            <a:normAutofit/>
+          </a:bodyPr>
           <a:lstStyle/>
           <a:p>
             <a:pPr indent="0" marL="0">
@@ -4779,7 +4941,9 @@
           <a:ln/>
         </p:spPr>
         <p:txBody>
-          <a:bodyPr wrap="square" rtlCol="0" anchor="t"/>
+          <a:bodyPr wrap="square" rtlCol="0" anchor="t">
+            <a:normAutofit/>
+          </a:bodyPr>
           <a:lstStyle/>
           <a:p>
             <a:pPr indent="0" marL="0">
@@ -4827,7 +4991,9 @@
           </a:ln>
         </p:spPr>
         <p:txBody>
-          <a:bodyPr/>
+          <a:bodyPr wrap="square">
+            <a:normAutofit/>
+          </a:bodyPr>
           <a:p/>
         </p:txBody>
       </p:sp>
@@ -4849,7 +5015,9 @@
           <a:ln/>
         </p:spPr>
         <p:txBody>
-          <a:bodyPr wrap="square" rtlCol="0" anchor="ctr"/>
+          <a:bodyPr wrap="square" rtlCol="0" anchor="ctr">
+            <a:normAutofit/>
+          </a:bodyPr>
           <a:lstStyle/>
           <a:p>
             <a:pPr indent="0" marL="0">
@@ -4888,7 +5056,9 @@
           <a:ln/>
         </p:spPr>
         <p:txBody>
-          <a:bodyPr wrap="square" rtlCol="0" anchor="t"/>
+          <a:bodyPr wrap="square" rtlCol="0" anchor="t">
+            <a:normAutofit/>
+          </a:bodyPr>
           <a:lstStyle/>
           <a:p>
             <a:pPr indent="0" marL="0">
@@ -4927,7 +5097,9 @@
           <a:ln/>
         </p:spPr>
         <p:txBody>
-          <a:bodyPr wrap="square" rtlCol="0" anchor="t"/>
+          <a:bodyPr wrap="square" rtlCol="0" anchor="t">
+            <a:normAutofit/>
+          </a:bodyPr>
           <a:lstStyle/>
           <a:p>
             <a:pPr indent="0" marL="0">
@@ -4966,7 +5138,9 @@
           <a:ln/>
         </p:spPr>
         <p:txBody>
-          <a:bodyPr wrap="square" rtlCol="0" anchor="t"/>
+          <a:bodyPr wrap="square" rtlCol="0" anchor="t">
+            <a:normAutofit/>
+          </a:bodyPr>
           <a:lstStyle/>
           <a:p>
             <a:pPr indent="0" marL="0">
@@ -5005,7 +5179,9 @@
           <a:ln/>
         </p:spPr>
         <p:txBody>
-          <a:bodyPr wrap="square" rtlCol="0" anchor="ctr"/>
+          <a:bodyPr wrap="square" rtlCol="0" anchor="ctr">
+            <a:normAutofit/>
+          </a:bodyPr>
           <a:lstStyle/>
           <a:p>
             <a:pPr algn="r" indent="0" marL="0">
@@ -5076,7 +5252,9 @@
           </a:ln>
         </p:spPr>
         <p:txBody>
-          <a:bodyPr/>
+          <a:bodyPr wrap="square">
+            <a:normAutofit/>
+          </a:bodyPr>
           <a:p/>
         </p:txBody>
       </p:sp>
@@ -5105,7 +5283,9 @@
           </a:ln>
         </p:spPr>
         <p:txBody>
-          <a:bodyPr/>
+          <a:bodyPr wrap="square">
+            <a:normAutofit/>
+          </a:bodyPr>
           <a:p/>
         </p:txBody>
       </p:sp>
@@ -5136,7 +5316,9 @@
           </a:ln>
         </p:spPr>
         <p:txBody>
-          <a:bodyPr/>
+          <a:bodyPr wrap="square">
+            <a:normAutofit/>
+          </a:bodyPr>
           <a:p/>
         </p:txBody>
       </p:sp>
@@ -5158,7 +5340,9 @@
           <a:ln/>
         </p:spPr>
         <p:txBody>
-          <a:bodyPr wrap="square" rtlCol="0" anchor="ctr"/>
+          <a:bodyPr wrap="square" rtlCol="0" anchor="ctr">
+            <a:normAutofit/>
+          </a:bodyPr>
           <a:lstStyle/>
           <a:p>
             <a:pPr algn="ctr" indent="0" marL="0">
@@ -5197,7 +5381,9 @@
           <a:ln/>
         </p:spPr>
         <p:txBody>
-          <a:bodyPr wrap="square" rtlCol="0" anchor="ctr"/>
+          <a:bodyPr wrap="square" rtlCol="0" anchor="ctr">
+            <a:normAutofit/>
+          </a:bodyPr>
           <a:lstStyle/>
           <a:p>
             <a:pPr indent="0" marL="0">
@@ -5236,7 +5422,9 @@
           <a:ln/>
         </p:spPr>
         <p:txBody>
-          <a:bodyPr wrap="square" rtlCol="0" anchor="ctr"/>
+          <a:bodyPr wrap="square" rtlCol="0" anchor="ctr">
+            <a:normAutofit/>
+          </a:bodyPr>
           <a:lstStyle/>
           <a:p>
             <a:pPr indent="0" marL="0">
@@ -5284,7 +5472,9 @@
           </a:ln>
         </p:spPr>
         <p:txBody>
-          <a:bodyPr/>
+          <a:bodyPr wrap="square">
+            <a:normAutofit/>
+          </a:bodyPr>
           <a:p/>
         </p:txBody>
       </p:sp>
@@ -5306,7 +5496,9 @@
           <a:ln/>
         </p:spPr>
         <p:txBody>
-          <a:bodyPr wrap="square" rtlCol="0" anchor="ctr"/>
+          <a:bodyPr wrap="square" rtlCol="0" anchor="ctr">
+            <a:normAutofit/>
+          </a:bodyPr>
           <a:lstStyle/>
           <a:p>
             <a:pPr indent="0" marL="0">
@@ -5345,7 +5537,9 @@
           <a:ln/>
         </p:spPr>
         <p:txBody>
-          <a:bodyPr wrap="square" rtlCol="0" anchor="ctr"/>
+          <a:bodyPr wrap="square" rtlCol="0" anchor="ctr">
+            <a:normAutofit/>
+          </a:bodyPr>
           <a:lstStyle/>
           <a:p>
             <a:pPr indent="0" marL="0">
@@ -5384,7 +5578,9 @@
           <a:ln/>
         </p:spPr>
         <p:txBody>
-          <a:bodyPr wrap="square" rtlCol="0" anchor="t"/>
+          <a:bodyPr wrap="square" rtlCol="0" anchor="t">
+            <a:normAutofit/>
+          </a:bodyPr>
           <a:lstStyle/>
           <a:p>
             <a:pPr indent="0" marL="0">
@@ -5423,7 +5619,9 @@
           <a:ln/>
         </p:spPr>
         <p:txBody>
-          <a:bodyPr wrap="square" rtlCol="0" anchor="ctr"/>
+          <a:bodyPr wrap="square" rtlCol="0" anchor="ctr">
+            <a:normAutofit/>
+          </a:bodyPr>
           <a:lstStyle/>
           <a:p>
             <a:pPr indent="0" marL="0">
@@ -5462,7 +5660,9 @@
           <a:ln/>
         </p:spPr>
         <p:txBody>
-          <a:bodyPr wrap="square" rtlCol="0" anchor="t"/>
+          <a:bodyPr wrap="square" rtlCol="0" anchor="t">
+            <a:normAutofit/>
+          </a:bodyPr>
           <a:lstStyle/>
           <a:p>
             <a:pPr indent="0" marL="0">
@@ -5501,7 +5701,9 @@
           <a:ln/>
         </p:spPr>
         <p:txBody>
-          <a:bodyPr wrap="square" rtlCol="0" anchor="ctr"/>
+          <a:bodyPr wrap="square" rtlCol="0" anchor="ctr">
+            <a:normAutofit/>
+          </a:bodyPr>
           <a:lstStyle/>
           <a:p>
             <a:pPr indent="0" marL="0">
@@ -5540,7 +5742,9 @@
           <a:ln/>
         </p:spPr>
         <p:txBody>
-          <a:bodyPr wrap="square" rtlCol="0" anchor="t"/>
+          <a:bodyPr wrap="square" rtlCol="0" anchor="t">
+            <a:normAutofit/>
+          </a:bodyPr>
           <a:lstStyle/>
           <a:p>
             <a:pPr indent="0" marL="0">
@@ -5588,7 +5792,9 @@
           </a:ln>
         </p:spPr>
         <p:txBody>
-          <a:bodyPr/>
+          <a:bodyPr wrap="square">
+            <a:normAutofit/>
+          </a:bodyPr>
           <a:p/>
         </p:txBody>
       </p:sp>
@@ -5610,7 +5816,9 @@
           <a:ln/>
         </p:spPr>
         <p:txBody>
-          <a:bodyPr wrap="square" rtlCol="0" anchor="ctr"/>
+          <a:bodyPr wrap="square" rtlCol="0" anchor="ctr">
+            <a:normAutofit/>
+          </a:bodyPr>
           <a:lstStyle/>
           <a:p>
             <a:pPr indent="0" marL="0">
@@ -5649,7 +5857,9 @@
           <a:ln/>
         </p:spPr>
         <p:txBody>
-          <a:bodyPr wrap="square" rtlCol="0" anchor="t"/>
+          <a:bodyPr wrap="square" rtlCol="0" anchor="t">
+            <a:normAutofit/>
+          </a:bodyPr>
           <a:lstStyle/>
           <a:p>
             <a:pPr indent="0" marL="0">
@@ -5688,7 +5898,9 @@
           <a:ln/>
         </p:spPr>
         <p:txBody>
-          <a:bodyPr wrap="square" rtlCol="0" anchor="t"/>
+          <a:bodyPr wrap="square" rtlCol="0" anchor="t">
+            <a:normAutofit/>
+          </a:bodyPr>
           <a:lstStyle/>
           <a:p>
             <a:pPr indent="0" marL="0">
@@ -5727,7 +5939,9 @@
           <a:ln/>
         </p:spPr>
         <p:txBody>
-          <a:bodyPr wrap="square" rtlCol="0" anchor="t"/>
+          <a:bodyPr wrap="square" rtlCol="0" anchor="t">
+            <a:normAutofit/>
+          </a:bodyPr>
           <a:lstStyle/>
           <a:p>
             <a:pPr indent="0" marL="0">
@@ -5766,7 +5980,9 @@
           <a:ln/>
         </p:spPr>
         <p:txBody>
-          <a:bodyPr wrap="square" rtlCol="0" anchor="ctr"/>
+          <a:bodyPr wrap="square" rtlCol="0" anchor="ctr">
+            <a:normAutofit/>
+          </a:bodyPr>
           <a:lstStyle/>
           <a:p>
             <a:pPr algn="r" indent="0" marL="0">
@@ -5837,7 +6053,9 @@
           </a:ln>
         </p:spPr>
         <p:txBody>
-          <a:bodyPr/>
+          <a:bodyPr wrap="square">
+            <a:normAutofit/>
+          </a:bodyPr>
           <a:p/>
         </p:txBody>
       </p:sp>
@@ -5866,7 +6084,9 @@
           </a:ln>
         </p:spPr>
         <p:txBody>
-          <a:bodyPr/>
+          <a:bodyPr wrap="square">
+            <a:normAutofit/>
+          </a:bodyPr>
           <a:p/>
         </p:txBody>
       </p:sp>
@@ -5897,7 +6117,9 @@
           </a:ln>
         </p:spPr>
         <p:txBody>
-          <a:bodyPr/>
+          <a:bodyPr wrap="square">
+            <a:normAutofit/>
+          </a:bodyPr>
           <a:p/>
         </p:txBody>
       </p:sp>
@@ -5919,7 +6141,9 @@
           <a:ln/>
         </p:spPr>
         <p:txBody>
-          <a:bodyPr wrap="square" rtlCol="0" anchor="ctr"/>
+          <a:bodyPr wrap="square" rtlCol="0" anchor="ctr">
+            <a:normAutofit/>
+          </a:bodyPr>
           <a:lstStyle/>
           <a:p>
             <a:pPr algn="ctr" indent="0" marL="0">
@@ -5958,7 +6182,9 @@
           <a:ln/>
         </p:spPr>
         <p:txBody>
-          <a:bodyPr wrap="square" rtlCol="0" anchor="ctr"/>
+          <a:bodyPr wrap="square" rtlCol="0" anchor="ctr">
+            <a:normAutofit/>
+          </a:bodyPr>
           <a:lstStyle/>
           <a:p>
             <a:pPr indent="0" marL="0">
@@ -5997,7 +6223,9 @@
           <a:ln/>
         </p:spPr>
         <p:txBody>
-          <a:bodyPr wrap="square" rtlCol="0" anchor="ctr"/>
+          <a:bodyPr wrap="square" rtlCol="0" anchor="ctr">
+            <a:normAutofit/>
+          </a:bodyPr>
           <a:lstStyle/>
           <a:p>
             <a:pPr indent="0" marL="0">
@@ -6045,7 +6273,9 @@
           </a:ln>
         </p:spPr>
         <p:txBody>
-          <a:bodyPr/>
+          <a:bodyPr wrap="square">
+            <a:normAutofit/>
+          </a:bodyPr>
           <a:p/>
         </p:txBody>
       </p:sp>
@@ -6067,7 +6297,9 @@
           <a:ln/>
         </p:spPr>
         <p:txBody>
-          <a:bodyPr wrap="square" rtlCol="0" anchor="ctr"/>
+          <a:bodyPr wrap="square" rtlCol="0" anchor="ctr">
+            <a:normAutofit/>
+          </a:bodyPr>
           <a:lstStyle/>
           <a:p>
             <a:pPr indent="0" marL="0">
@@ -6106,7 +6338,9 @@
           <a:ln/>
         </p:spPr>
         <p:txBody>
-          <a:bodyPr wrap="square" rtlCol="0" anchor="ctr"/>
+          <a:bodyPr wrap="square" rtlCol="0" anchor="ctr">
+            <a:normAutofit/>
+          </a:bodyPr>
           <a:lstStyle/>
           <a:p>
             <a:pPr indent="0" marL="0">
@@ -6145,7 +6379,9 @@
           <a:ln/>
         </p:spPr>
         <p:txBody>
-          <a:bodyPr wrap="square" rtlCol="0" anchor="t"/>
+          <a:bodyPr wrap="square" rtlCol="0" anchor="t">
+            <a:normAutofit/>
+          </a:bodyPr>
           <a:lstStyle/>
           <a:p>
             <a:pPr indent="0" marL="0">
@@ -6184,7 +6420,9 @@
           <a:ln/>
         </p:spPr>
         <p:txBody>
-          <a:bodyPr wrap="square" rtlCol="0" anchor="ctr"/>
+          <a:bodyPr wrap="square" rtlCol="0" anchor="ctr">
+            <a:normAutofit/>
+          </a:bodyPr>
           <a:lstStyle/>
           <a:p>
             <a:pPr indent="0" marL="0">
@@ -6223,7 +6461,9 @@
           <a:ln/>
         </p:spPr>
         <p:txBody>
-          <a:bodyPr wrap="square" rtlCol="0" anchor="t"/>
+          <a:bodyPr wrap="square" rtlCol="0" anchor="t">
+            <a:normAutofit/>
+          </a:bodyPr>
           <a:lstStyle/>
           <a:p>
             <a:pPr indent="0" marL="0">
@@ -6262,7 +6502,9 @@
           <a:ln/>
         </p:spPr>
         <p:txBody>
-          <a:bodyPr wrap="square" rtlCol="0" anchor="ctr"/>
+          <a:bodyPr wrap="square" rtlCol="0" anchor="ctr">
+            <a:normAutofit/>
+          </a:bodyPr>
           <a:lstStyle/>
           <a:p>
             <a:pPr indent="0" marL="0">
@@ -6301,7 +6543,9 @@
           <a:ln/>
         </p:spPr>
         <p:txBody>
-          <a:bodyPr wrap="square" rtlCol="0" anchor="t"/>
+          <a:bodyPr wrap="square" rtlCol="0" anchor="t">
+            <a:normAutofit/>
+          </a:bodyPr>
           <a:lstStyle/>
           <a:p>
             <a:pPr indent="0" marL="0">
@@ -6349,7 +6593,9 @@
           </a:ln>
         </p:spPr>
         <p:txBody>
-          <a:bodyPr/>
+          <a:bodyPr wrap="square">
+            <a:normAutofit/>
+          </a:bodyPr>
           <a:p/>
         </p:txBody>
       </p:sp>
@@ -6371,7 +6617,9 @@
           <a:ln/>
         </p:spPr>
         <p:txBody>
-          <a:bodyPr wrap="square" rtlCol="0" anchor="ctr"/>
+          <a:bodyPr wrap="square" rtlCol="0" anchor="ctr">
+            <a:normAutofit/>
+          </a:bodyPr>
           <a:lstStyle/>
           <a:p>
             <a:pPr indent="0" marL="0">
@@ -6410,7 +6658,9 @@
           <a:ln/>
         </p:spPr>
         <p:txBody>
-          <a:bodyPr wrap="square" rtlCol="0" anchor="t"/>
+          <a:bodyPr wrap="square" rtlCol="0" anchor="t">
+            <a:normAutofit/>
+          </a:bodyPr>
           <a:lstStyle/>
           <a:p>
             <a:pPr indent="0" marL="0">
@@ -6449,7 +6699,9 @@
           <a:ln/>
         </p:spPr>
         <p:txBody>
-          <a:bodyPr wrap="square" rtlCol="0" anchor="t"/>
+          <a:bodyPr wrap="square" rtlCol="0" anchor="t">
+            <a:normAutofit/>
+          </a:bodyPr>
           <a:lstStyle/>
           <a:p>
             <a:pPr indent="0" marL="0">
@@ -6488,7 +6740,9 @@
           <a:ln/>
         </p:spPr>
         <p:txBody>
-          <a:bodyPr wrap="square" rtlCol="0" anchor="t"/>
+          <a:bodyPr wrap="square" rtlCol="0" anchor="t">
+            <a:normAutofit/>
+          </a:bodyPr>
           <a:lstStyle/>
           <a:p>
             <a:pPr indent="0" marL="0">
@@ -6527,7 +6781,9 @@
           <a:ln/>
         </p:spPr>
         <p:txBody>
-          <a:bodyPr wrap="square" rtlCol="0" anchor="ctr"/>
+          <a:bodyPr wrap="square" rtlCol="0" anchor="ctr">
+            <a:normAutofit/>
+          </a:bodyPr>
           <a:lstStyle/>
           <a:p>
             <a:pPr algn="r" indent="0" marL="0">
@@ -6598,7 +6854,9 @@
           </a:ln>
         </p:spPr>
         <p:txBody>
-          <a:bodyPr/>
+          <a:bodyPr wrap="square">
+            <a:normAutofit/>
+          </a:bodyPr>
           <a:p/>
         </p:txBody>
       </p:sp>
@@ -6627,7 +6885,9 @@
           </a:ln>
         </p:spPr>
         <p:txBody>
-          <a:bodyPr/>
+          <a:bodyPr wrap="square">
+            <a:normAutofit/>
+          </a:bodyPr>
           <a:p/>
         </p:txBody>
       </p:sp>
@@ -6649,7 +6909,9 @@
           <a:ln/>
         </p:spPr>
         <p:txBody>
-          <a:bodyPr wrap="square" rtlCol="0" anchor="ctr"/>
+          <a:bodyPr wrap="square" rtlCol="0" anchor="ctr">
+            <a:normAutofit/>
+          </a:bodyPr>
           <a:lstStyle/>
           <a:p>
             <a:pPr indent="0" marL="0">
@@ -6688,7 +6950,9 @@
           <a:ln/>
         </p:spPr>
         <p:txBody>
-          <a:bodyPr wrap="square" rtlCol="0" anchor="ctr"/>
+          <a:bodyPr wrap="square" rtlCol="0" anchor="ctr">
+            <a:normAutofit/>
+          </a:bodyPr>
           <a:lstStyle/>
           <a:p>
             <a:pPr algn="ctr" indent="0" marL="0">
@@ -6727,7 +6991,9 @@
           <a:ln/>
         </p:spPr>
         <p:txBody>
-          <a:bodyPr wrap="square" rtlCol="0" anchor="ctr"/>
+          <a:bodyPr wrap="square" rtlCol="0" anchor="ctr">
+            <a:normAutofit/>
+          </a:bodyPr>
           <a:lstStyle/>
           <a:p>
             <a:pPr algn="ctr" indent="0" marL="0">
@@ -6775,7 +7041,9 @@
           </a:ln>
         </p:spPr>
         <p:txBody>
-          <a:bodyPr/>
+          <a:bodyPr wrap="square">
+            <a:normAutofit/>
+          </a:bodyPr>
           <a:p/>
         </p:txBody>
       </p:sp>
@@ -6804,7 +7072,9 @@
           </a:ln>
         </p:spPr>
         <p:txBody>
-          <a:bodyPr/>
+          <a:bodyPr wrap="square">
+            <a:normAutofit/>
+          </a:bodyPr>
           <a:p/>
         </p:txBody>
       </p:sp>
@@ -6826,7 +7096,9 @@
           <a:ln/>
         </p:spPr>
         <p:txBody>
-          <a:bodyPr wrap="square" rtlCol="0" anchor="ctr"/>
+          <a:bodyPr wrap="square" rtlCol="0" anchor="ctr">
+            <a:normAutofit/>
+          </a:bodyPr>
           <a:lstStyle/>
           <a:p>
             <a:pPr algn="ctr" indent="0" marL="0">
@@ -6865,7 +7137,9 @@
           <a:ln/>
         </p:spPr>
         <p:txBody>
-          <a:bodyPr wrap="square" rtlCol="0" anchor="ctr"/>
+          <a:bodyPr wrap="square" rtlCol="0" anchor="ctr">
+            <a:normAutofit/>
+          </a:bodyPr>
           <a:lstStyle/>
           <a:p>
             <a:pPr indent="0" marL="0">
@@ -6904,7 +7178,9 @@
           <a:ln/>
         </p:spPr>
         <p:txBody>
-          <a:bodyPr wrap="square" rtlCol="0" anchor="ctr"/>
+          <a:bodyPr wrap="square" rtlCol="0" anchor="ctr">
+            <a:normAutofit/>
+          </a:bodyPr>
           <a:lstStyle/>
           <a:p>
             <a:pPr indent="0" marL="0">
@@ -6952,7 +7228,9 @@
           </a:ln>
         </p:spPr>
         <p:txBody>
-          <a:bodyPr/>
+          <a:bodyPr wrap="square">
+            <a:normAutofit/>
+          </a:bodyPr>
           <a:p/>
         </p:txBody>
       </p:sp>
@@ -6981,7 +7259,9 @@
           </a:ln>
         </p:spPr>
         <p:txBody>
-          <a:bodyPr/>
+          <a:bodyPr wrap="square">
+            <a:normAutofit/>
+          </a:bodyPr>
           <a:p/>
         </p:txBody>
       </p:sp>
@@ -7003,7 +7283,9 @@
           <a:ln/>
         </p:spPr>
         <p:txBody>
-          <a:bodyPr wrap="square" rtlCol="0" anchor="ctr"/>
+          <a:bodyPr wrap="square" rtlCol="0" anchor="ctr">
+            <a:normAutofit/>
+          </a:bodyPr>
           <a:lstStyle/>
           <a:p>
             <a:pPr algn="ctr" indent="0" marL="0">
@@ -7042,7 +7324,9 @@
           <a:ln/>
         </p:spPr>
         <p:txBody>
-          <a:bodyPr wrap="square" rtlCol="0" anchor="ctr"/>
+          <a:bodyPr wrap="square" rtlCol="0" anchor="ctr">
+            <a:normAutofit/>
+          </a:bodyPr>
           <a:lstStyle/>
           <a:p>
             <a:pPr indent="0" marL="0">
@@ -7081,7 +7365,9 @@
           <a:ln/>
         </p:spPr>
         <p:txBody>
-          <a:bodyPr wrap="square" rtlCol="0" anchor="ctr"/>
+          <a:bodyPr wrap="square" rtlCol="0" anchor="ctr">
+            <a:normAutofit/>
+          </a:bodyPr>
           <a:lstStyle/>
           <a:p>
             <a:pPr indent="0" marL="0">
@@ -7129,7 +7415,9 @@
           </a:ln>
         </p:spPr>
         <p:txBody>
-          <a:bodyPr/>
+          <a:bodyPr wrap="square">
+            <a:normAutofit/>
+          </a:bodyPr>
           <a:p/>
         </p:txBody>
       </p:sp>
@@ -7158,7 +7446,9 @@
           </a:ln>
         </p:spPr>
         <p:txBody>
-          <a:bodyPr/>
+          <a:bodyPr wrap="square">
+            <a:normAutofit/>
+          </a:bodyPr>
           <a:p/>
         </p:txBody>
       </p:sp>
@@ -7180,7 +7470,9 @@
           <a:ln/>
         </p:spPr>
         <p:txBody>
-          <a:bodyPr wrap="square" rtlCol="0" anchor="ctr"/>
+          <a:bodyPr wrap="square" rtlCol="0" anchor="ctr">
+            <a:normAutofit/>
+          </a:bodyPr>
           <a:lstStyle/>
           <a:p>
             <a:pPr algn="ctr" indent="0" marL="0">
@@ -7219,7 +7511,9 @@
           <a:ln/>
         </p:spPr>
         <p:txBody>
-          <a:bodyPr wrap="square" rtlCol="0" anchor="ctr"/>
+          <a:bodyPr wrap="square" rtlCol="0" anchor="ctr">
+            <a:normAutofit/>
+          </a:bodyPr>
           <a:lstStyle/>
           <a:p>
             <a:pPr indent="0" marL="0">
@@ -7258,7 +7552,9 @@
           <a:ln/>
         </p:spPr>
         <p:txBody>
-          <a:bodyPr wrap="square" rtlCol="0" anchor="ctr"/>
+          <a:bodyPr wrap="square" rtlCol="0" anchor="ctr">
+            <a:normAutofit/>
+          </a:bodyPr>
           <a:lstStyle/>
           <a:p>
             <a:pPr indent="0" marL="0">
@@ -7297,7 +7593,9 @@
           <a:ln/>
         </p:spPr>
         <p:txBody>
-          <a:bodyPr wrap="square" rtlCol="0" anchor="ctr"/>
+          <a:bodyPr wrap="square" rtlCol="0" anchor="ctr">
+            <a:normAutofit/>
+          </a:bodyPr>
           <a:lstStyle/>
           <a:p>
             <a:pPr algn="r" indent="0" marL="0">

--- a/pptx_sessions_8_22/第21回_応用編_受講者用.pptx
+++ b/pptx_sessions_8_22/第21回_応用編_受講者用.pptx
@@ -1527,9 +1527,7 @@
           </a:ln>
         </p:spPr>
         <p:txBody>
-          <a:bodyPr wrap="square">
-            <a:normAutofit/>
-          </a:bodyPr>
+          <a:bodyPr/>
           <a:p/>
         </p:txBody>
       </p:sp>
@@ -1558,9 +1556,7 @@
           </a:ln>
         </p:spPr>
         <p:txBody>
-          <a:bodyPr wrap="square">
-            <a:normAutofit/>
-          </a:bodyPr>
+          <a:bodyPr/>
           <a:p/>
         </p:txBody>
       </p:sp>
@@ -1582,9 +1578,7 @@
           <a:ln/>
         </p:spPr>
         <p:txBody>
-          <a:bodyPr wrap="square" rtlCol="0" anchor="ctr">
-            <a:normAutofit/>
-          </a:bodyPr>
+          <a:bodyPr wrap="square" rtlCol="0" anchor="ctr"/>
           <a:lstStyle/>
           <a:p>
             <a:pPr algn="ctr" indent="0" marL="0">
@@ -1623,9 +1617,7 @@
           <a:ln/>
         </p:spPr>
         <p:txBody>
-          <a:bodyPr wrap="square" rtlCol="0" anchor="ctr">
-            <a:normAutofit/>
-          </a:bodyPr>
+          <a:bodyPr wrap="square" rtlCol="0" anchor="ctr"/>
           <a:lstStyle/>
           <a:p>
             <a:pPr algn="ctr" indent="0" marL="0">
@@ -1664,9 +1656,7 @@
           <a:ln/>
         </p:spPr>
         <p:txBody>
-          <a:bodyPr wrap="square" rtlCol="0" anchor="ctr">
-            <a:normAutofit/>
-          </a:bodyPr>
+          <a:bodyPr wrap="square" rtlCol="0" anchor="ctr"/>
           <a:lstStyle/>
           <a:p>
             <a:pPr algn="ctr" indent="0" marL="0">
@@ -1705,9 +1695,7 @@
           <a:ln/>
         </p:spPr>
         <p:txBody>
-          <a:bodyPr wrap="square" rtlCol="0" anchor="ctr">
-            <a:normAutofit/>
-          </a:bodyPr>
+          <a:bodyPr wrap="square" rtlCol="0" anchor="ctr"/>
           <a:lstStyle/>
           <a:p>
             <a:pPr algn="ctr" indent="0" marL="0">
@@ -1755,9 +1743,7 @@
           </a:ln>
         </p:spPr>
         <p:txBody>
-          <a:bodyPr wrap="square">
-            <a:normAutofit/>
-          </a:bodyPr>
+          <a:bodyPr/>
           <a:p/>
         </p:txBody>
       </p:sp>
@@ -1779,9 +1765,7 @@
           <a:ln/>
         </p:spPr>
         <p:txBody>
-          <a:bodyPr wrap="square" rtlCol="0" anchor="ctr">
-            <a:normAutofit/>
-          </a:bodyPr>
+          <a:bodyPr wrap="square" rtlCol="0" anchor="ctr"/>
           <a:lstStyle/>
           <a:p>
             <a:pPr algn="ctr" indent="0" marL="0">
@@ -1852,9 +1836,7 @@
           </a:ln>
         </p:spPr>
         <p:txBody>
-          <a:bodyPr wrap="square">
-            <a:normAutofit/>
-          </a:bodyPr>
+          <a:bodyPr/>
           <a:p/>
         </p:txBody>
       </p:sp>
@@ -1883,9 +1865,7 @@
           </a:ln>
         </p:spPr>
         <p:txBody>
-          <a:bodyPr wrap="square">
-            <a:normAutofit/>
-          </a:bodyPr>
+          <a:bodyPr/>
           <a:p/>
         </p:txBody>
       </p:sp>
@@ -1907,9 +1887,7 @@
           <a:ln/>
         </p:spPr>
         <p:txBody>
-          <a:bodyPr wrap="square" rtlCol="0" anchor="ctr">
-            <a:normAutofit/>
-          </a:bodyPr>
+          <a:bodyPr wrap="square" rtlCol="0" anchor="ctr"/>
           <a:lstStyle/>
           <a:p>
             <a:pPr indent="0" marL="0">
@@ -1948,9 +1926,7 @@
           <a:ln/>
         </p:spPr>
         <p:txBody>
-          <a:bodyPr wrap="square" rtlCol="0" anchor="ctr">
-            <a:normAutofit/>
-          </a:bodyPr>
+          <a:bodyPr wrap="square" rtlCol="0" anchor="ctr"/>
           <a:lstStyle/>
           <a:p>
             <a:pPr indent="0" marL="0">
@@ -1998,9 +1974,7 @@
           </a:ln>
         </p:spPr>
         <p:txBody>
-          <a:bodyPr wrap="square">
-            <a:normAutofit/>
-          </a:bodyPr>
+          <a:bodyPr/>
           <a:p/>
         </p:txBody>
       </p:sp>
@@ -2022,9 +1996,7 @@
           <a:ln/>
         </p:spPr>
         <p:txBody>
-          <a:bodyPr wrap="square" rtlCol="0" anchor="ctr">
-            <a:normAutofit/>
-          </a:bodyPr>
+          <a:bodyPr wrap="square" rtlCol="0" anchor="ctr"/>
           <a:lstStyle/>
           <a:p>
             <a:pPr indent="0" marL="0">
@@ -2063,9 +2035,7 @@
           <a:ln/>
         </p:spPr>
         <p:txBody>
-          <a:bodyPr wrap="square" rtlCol="0" anchor="ctr">
-            <a:normAutofit/>
-          </a:bodyPr>
+          <a:bodyPr wrap="square" rtlCol="0" anchor="ctr"/>
           <a:lstStyle/>
           <a:p>
             <a:pPr indent="0" marL="0">
@@ -2104,9 +2074,7 @@
           <a:ln/>
         </p:spPr>
         <p:txBody>
-          <a:bodyPr wrap="square" rtlCol="0" anchor="ctr">
-            <a:normAutofit/>
-          </a:bodyPr>
+          <a:bodyPr wrap="square" rtlCol="0" anchor="ctr"/>
           <a:lstStyle/>
           <a:p>
             <a:pPr indent="0" marL="0">
@@ -2154,9 +2122,7 @@
           </a:ln>
         </p:spPr>
         <p:txBody>
-          <a:bodyPr wrap="square">
-            <a:normAutofit/>
-          </a:bodyPr>
+          <a:bodyPr/>
           <a:p/>
         </p:txBody>
       </p:sp>
@@ -2178,9 +2144,7 @@
           <a:ln/>
         </p:spPr>
         <p:txBody>
-          <a:bodyPr wrap="square" rtlCol="0" anchor="ctr">
-            <a:normAutofit/>
-          </a:bodyPr>
+          <a:bodyPr wrap="square" rtlCol="0" anchor="ctr"/>
           <a:lstStyle/>
           <a:p>
             <a:pPr indent="0" marL="0">
@@ -2219,9 +2183,7 @@
           <a:ln/>
         </p:spPr>
         <p:txBody>
-          <a:bodyPr wrap="square" rtlCol="0" anchor="ctr">
-            <a:normAutofit/>
-          </a:bodyPr>
+          <a:bodyPr wrap="square" rtlCol="0" anchor="ctr"/>
           <a:lstStyle/>
           <a:p>
             <a:pPr indent="0" marL="0">
@@ -2260,9 +2222,7 @@
           <a:ln/>
         </p:spPr>
         <p:txBody>
-          <a:bodyPr wrap="square" rtlCol="0" anchor="ctr">
-            <a:normAutofit/>
-          </a:bodyPr>
+          <a:bodyPr wrap="square" rtlCol="0" anchor="ctr"/>
           <a:lstStyle/>
           <a:p>
             <a:pPr indent="0" marL="0">
@@ -2310,9 +2270,7 @@
           </a:ln>
         </p:spPr>
         <p:txBody>
-          <a:bodyPr wrap="square">
-            <a:normAutofit/>
-          </a:bodyPr>
+          <a:bodyPr/>
           <a:p/>
         </p:txBody>
       </p:sp>
@@ -2334,9 +2292,7 @@
           <a:ln/>
         </p:spPr>
         <p:txBody>
-          <a:bodyPr wrap="square" rtlCol="0" anchor="ctr">
-            <a:normAutofit/>
-          </a:bodyPr>
+          <a:bodyPr wrap="square" rtlCol="0" anchor="ctr"/>
           <a:lstStyle/>
           <a:p>
             <a:pPr indent="0" marL="0">
@@ -2375,9 +2331,7 @@
           <a:ln/>
         </p:spPr>
         <p:txBody>
-          <a:bodyPr wrap="square" rtlCol="0" anchor="ctr">
-            <a:normAutofit/>
-          </a:bodyPr>
+          <a:bodyPr wrap="square" rtlCol="0" anchor="ctr"/>
           <a:lstStyle/>
           <a:p>
             <a:pPr indent="0" marL="0">
@@ -2416,9 +2370,7 @@
           <a:ln/>
         </p:spPr>
         <p:txBody>
-          <a:bodyPr wrap="square" rtlCol="0" anchor="ctr">
-            <a:normAutofit/>
-          </a:bodyPr>
+          <a:bodyPr wrap="square" rtlCol="0" anchor="ctr"/>
           <a:lstStyle/>
           <a:p>
             <a:pPr indent="0" marL="0">
@@ -2457,9 +2409,7 @@
           <a:ln/>
         </p:spPr>
         <p:txBody>
-          <a:bodyPr wrap="square" rtlCol="0" anchor="ctr">
-            <a:normAutofit/>
-          </a:bodyPr>
+          <a:bodyPr wrap="square" rtlCol="0" anchor="ctr"/>
           <a:lstStyle/>
           <a:p>
             <a:pPr algn="r" indent="0" marL="0">
@@ -2530,9 +2480,7 @@
           </a:ln>
         </p:spPr>
         <p:txBody>
-          <a:bodyPr wrap="square">
-            <a:normAutofit/>
-          </a:bodyPr>
+          <a:bodyPr/>
           <a:p/>
         </p:txBody>
       </p:sp>
@@ -2561,9 +2509,7 @@
           </a:ln>
         </p:spPr>
         <p:txBody>
-          <a:bodyPr wrap="square">
-            <a:normAutofit/>
-          </a:bodyPr>
+          <a:bodyPr/>
           <a:p/>
         </p:txBody>
       </p:sp>
@@ -2585,9 +2531,7 @@
           <a:ln/>
         </p:spPr>
         <p:txBody>
-          <a:bodyPr wrap="square" rtlCol="0" anchor="ctr">
-            <a:normAutofit/>
-          </a:bodyPr>
+          <a:bodyPr wrap="square" rtlCol="0" anchor="ctr"/>
           <a:lstStyle/>
           <a:p>
             <a:pPr indent="0" marL="0">
@@ -2626,9 +2570,7 @@
           <a:ln/>
         </p:spPr>
         <p:txBody>
-          <a:bodyPr wrap="square" rtlCol="0" anchor="ctr">
-            <a:normAutofit/>
-          </a:bodyPr>
+          <a:bodyPr wrap="square" rtlCol="0" anchor="ctr"/>
           <a:lstStyle/>
           <a:p>
             <a:pPr indent="0" marL="0">
@@ -2674,9 +2616,7 @@
           </a:ln>
         </p:spPr>
         <p:txBody>
-          <a:bodyPr wrap="square">
-            <a:normAutofit/>
-          </a:bodyPr>
+          <a:bodyPr/>
           <a:p/>
         </p:txBody>
       </p:sp>
@@ -2707,9 +2647,7 @@
           </a:ln>
         </p:spPr>
         <p:txBody>
-          <a:bodyPr wrap="square">
-            <a:normAutofit/>
-          </a:bodyPr>
+          <a:bodyPr/>
           <a:p/>
         </p:txBody>
       </p:sp>
@@ -2731,9 +2669,7 @@
           <a:ln/>
         </p:spPr>
         <p:txBody>
-          <a:bodyPr wrap="square" rtlCol="0" anchor="ctr">
-            <a:normAutofit/>
-          </a:bodyPr>
+          <a:bodyPr wrap="square" rtlCol="0" anchor="ctr"/>
           <a:lstStyle/>
           <a:p>
             <a:pPr algn="ctr" indent="0" marL="0">
@@ -2772,9 +2708,7 @@
           <a:ln/>
         </p:spPr>
         <p:txBody>
-          <a:bodyPr wrap="square" rtlCol="0" anchor="ctr">
-            <a:normAutofit/>
-          </a:bodyPr>
+          <a:bodyPr wrap="square" rtlCol="0" anchor="ctr"/>
           <a:lstStyle/>
           <a:p>
             <a:pPr indent="0" marL="0">
@@ -2820,9 +2754,7 @@
           </a:ln>
         </p:spPr>
         <p:txBody>
-          <a:bodyPr wrap="square">
-            <a:normAutofit/>
-          </a:bodyPr>
+          <a:bodyPr/>
           <a:p/>
         </p:txBody>
       </p:sp>
@@ -2853,9 +2785,7 @@
           </a:ln>
         </p:spPr>
         <p:txBody>
-          <a:bodyPr wrap="square">
-            <a:normAutofit/>
-          </a:bodyPr>
+          <a:bodyPr/>
           <a:p/>
         </p:txBody>
       </p:sp>
@@ -2877,9 +2807,7 @@
           <a:ln/>
         </p:spPr>
         <p:txBody>
-          <a:bodyPr wrap="square" rtlCol="0" anchor="ctr">
-            <a:normAutofit/>
-          </a:bodyPr>
+          <a:bodyPr wrap="square" rtlCol="0" anchor="ctr"/>
           <a:lstStyle/>
           <a:p>
             <a:pPr algn="ctr" indent="0" marL="0">
@@ -2918,9 +2846,7 @@
           <a:ln/>
         </p:spPr>
         <p:txBody>
-          <a:bodyPr wrap="square" rtlCol="0" anchor="ctr">
-            <a:normAutofit/>
-          </a:bodyPr>
+          <a:bodyPr wrap="square" rtlCol="0" anchor="ctr"/>
           <a:lstStyle/>
           <a:p>
             <a:pPr indent="0" marL="0">
@@ -2959,9 +2885,7 @@
           <a:ln/>
         </p:spPr>
         <p:txBody>
-          <a:bodyPr wrap="square" rtlCol="0" anchor="ctr">
-            <a:normAutofit/>
-          </a:bodyPr>
+          <a:bodyPr wrap="square" rtlCol="0" anchor="ctr"/>
           <a:lstStyle/>
           <a:p>
             <a:pPr indent="0" marL="0">
@@ -3009,9 +2933,7 @@
           </a:ln>
         </p:spPr>
         <p:txBody>
-          <a:bodyPr wrap="square">
-            <a:normAutofit/>
-          </a:bodyPr>
+          <a:bodyPr/>
           <a:p/>
         </p:txBody>
       </p:sp>
@@ -3042,9 +2964,7 @@
           </a:ln>
         </p:spPr>
         <p:txBody>
-          <a:bodyPr wrap="square">
-            <a:normAutofit/>
-          </a:bodyPr>
+          <a:bodyPr/>
           <a:p/>
         </p:txBody>
       </p:sp>
@@ -3066,9 +2986,7 @@
           <a:ln/>
         </p:spPr>
         <p:txBody>
-          <a:bodyPr wrap="square" rtlCol="0" anchor="ctr">
-            <a:normAutofit/>
-          </a:bodyPr>
+          <a:bodyPr wrap="square" rtlCol="0" anchor="ctr"/>
           <a:lstStyle/>
           <a:p>
             <a:pPr algn="ctr" indent="0" marL="0">
@@ -3107,9 +3025,7 @@
           <a:ln/>
         </p:spPr>
         <p:txBody>
-          <a:bodyPr wrap="square" rtlCol="0" anchor="ctr">
-            <a:normAutofit/>
-          </a:bodyPr>
+          <a:bodyPr wrap="square" rtlCol="0" anchor="ctr"/>
           <a:lstStyle/>
           <a:p>
             <a:pPr indent="0" marL="0">
@@ -3157,9 +3073,7 @@
           </a:ln>
         </p:spPr>
         <p:txBody>
-          <a:bodyPr wrap="square">
-            <a:normAutofit/>
-          </a:bodyPr>
+          <a:bodyPr/>
           <a:p/>
         </p:txBody>
       </p:sp>
@@ -3190,9 +3104,7 @@
           </a:ln>
         </p:spPr>
         <p:txBody>
-          <a:bodyPr wrap="square">
-            <a:normAutofit/>
-          </a:bodyPr>
+          <a:bodyPr/>
           <a:p/>
         </p:txBody>
       </p:sp>
@@ -3214,9 +3126,7 @@
           <a:ln/>
         </p:spPr>
         <p:txBody>
-          <a:bodyPr wrap="square" rtlCol="0" anchor="ctr">
-            <a:normAutofit/>
-          </a:bodyPr>
+          <a:bodyPr wrap="square" rtlCol="0" anchor="ctr"/>
           <a:lstStyle/>
           <a:p>
             <a:pPr algn="ctr" indent="0" marL="0">
@@ -3255,9 +3165,7 @@
           <a:ln/>
         </p:spPr>
         <p:txBody>
-          <a:bodyPr wrap="square" rtlCol="0" anchor="ctr">
-            <a:normAutofit/>
-          </a:bodyPr>
+          <a:bodyPr wrap="square" rtlCol="0" anchor="ctr"/>
           <a:lstStyle/>
           <a:p>
             <a:pPr indent="0" marL="0">
@@ -3305,9 +3213,7 @@
           </a:ln>
         </p:spPr>
         <p:txBody>
-          <a:bodyPr wrap="square">
-            <a:normAutofit/>
-          </a:bodyPr>
+          <a:bodyPr/>
           <a:p/>
         </p:txBody>
       </p:sp>
@@ -3338,9 +3244,7 @@
           </a:ln>
         </p:spPr>
         <p:txBody>
-          <a:bodyPr wrap="square">
-            <a:normAutofit/>
-          </a:bodyPr>
+          <a:bodyPr/>
           <a:p/>
         </p:txBody>
       </p:sp>
@@ -3362,9 +3266,7 @@
           <a:ln/>
         </p:spPr>
         <p:txBody>
-          <a:bodyPr wrap="square" rtlCol="0" anchor="ctr">
-            <a:normAutofit/>
-          </a:bodyPr>
+          <a:bodyPr wrap="square" rtlCol="0" anchor="ctr"/>
           <a:lstStyle/>
           <a:p>
             <a:pPr algn="ctr" indent="0" marL="0">
@@ -3403,9 +3305,7 @@
           <a:ln/>
         </p:spPr>
         <p:txBody>
-          <a:bodyPr wrap="square" rtlCol="0" anchor="ctr">
-            <a:normAutofit/>
-          </a:bodyPr>
+          <a:bodyPr wrap="square" rtlCol="0" anchor="ctr"/>
           <a:lstStyle/>
           <a:p>
             <a:pPr indent="0" marL="0">
@@ -3453,9 +3353,7 @@
           </a:ln>
         </p:spPr>
         <p:txBody>
-          <a:bodyPr wrap="square">
-            <a:normAutofit/>
-          </a:bodyPr>
+          <a:bodyPr/>
           <a:p/>
         </p:txBody>
       </p:sp>
@@ -3486,9 +3384,7 @@
           </a:ln>
         </p:spPr>
         <p:txBody>
-          <a:bodyPr wrap="square">
-            <a:normAutofit/>
-          </a:bodyPr>
+          <a:bodyPr/>
           <a:p/>
         </p:txBody>
       </p:sp>
@@ -3510,9 +3406,7 @@
           <a:ln/>
         </p:spPr>
         <p:txBody>
-          <a:bodyPr wrap="square" rtlCol="0" anchor="ctr">
-            <a:normAutofit/>
-          </a:bodyPr>
+          <a:bodyPr wrap="square" rtlCol="0" anchor="ctr"/>
           <a:lstStyle/>
           <a:p>
             <a:pPr algn="ctr" indent="0" marL="0">
@@ -3551,9 +3445,7 @@
           <a:ln/>
         </p:spPr>
         <p:txBody>
-          <a:bodyPr wrap="square" rtlCol="0" anchor="ctr">
-            <a:normAutofit/>
-          </a:bodyPr>
+          <a:bodyPr wrap="square" rtlCol="0" anchor="ctr"/>
           <a:lstStyle/>
           <a:p>
             <a:pPr indent="0" marL="0">
@@ -3592,9 +3484,7 @@
           <a:ln/>
         </p:spPr>
         <p:txBody>
-          <a:bodyPr wrap="square" rtlCol="0" anchor="ctr">
-            <a:normAutofit/>
-          </a:bodyPr>
+          <a:bodyPr wrap="square" rtlCol="0" anchor="ctr"/>
           <a:lstStyle/>
           <a:p>
             <a:pPr algn="r" indent="0" marL="0">
@@ -3665,9 +3555,7 @@
           </a:ln>
         </p:spPr>
         <p:txBody>
-          <a:bodyPr wrap="square">
-            <a:normAutofit/>
-          </a:bodyPr>
+          <a:bodyPr/>
           <a:p/>
         </p:txBody>
       </p:sp>
@@ -3696,9 +3584,7 @@
           </a:ln>
         </p:spPr>
         <p:txBody>
-          <a:bodyPr wrap="square">
-            <a:normAutofit/>
-          </a:bodyPr>
+          <a:bodyPr/>
           <a:p/>
         </p:txBody>
       </p:sp>
@@ -3729,9 +3615,7 @@
           </a:ln>
         </p:spPr>
         <p:txBody>
-          <a:bodyPr wrap="square">
-            <a:normAutofit/>
-          </a:bodyPr>
+          <a:bodyPr/>
           <a:p/>
         </p:txBody>
       </p:sp>
@@ -3753,9 +3637,7 @@
           <a:ln/>
         </p:spPr>
         <p:txBody>
-          <a:bodyPr wrap="square" rtlCol="0" anchor="ctr">
-            <a:normAutofit/>
-          </a:bodyPr>
+          <a:bodyPr wrap="square" rtlCol="0" anchor="ctr"/>
           <a:lstStyle/>
           <a:p>
             <a:pPr algn="ctr" indent="0" marL="0">
@@ -3794,9 +3676,7 @@
           <a:ln/>
         </p:spPr>
         <p:txBody>
-          <a:bodyPr wrap="square" rtlCol="0" anchor="ctr">
-            <a:normAutofit/>
-          </a:bodyPr>
+          <a:bodyPr wrap="square" rtlCol="0" anchor="ctr"/>
           <a:lstStyle/>
           <a:p>
             <a:pPr indent="0" marL="0">
@@ -3835,9 +3715,7 @@
           <a:ln/>
         </p:spPr>
         <p:txBody>
-          <a:bodyPr wrap="square" rtlCol="0" anchor="ctr">
-            <a:normAutofit/>
-          </a:bodyPr>
+          <a:bodyPr wrap="square" rtlCol="0" anchor="ctr"/>
           <a:lstStyle/>
           <a:p>
             <a:pPr indent="0" marL="0">
@@ -3885,9 +3763,7 @@
           </a:ln>
         </p:spPr>
         <p:txBody>
-          <a:bodyPr wrap="square">
-            <a:normAutofit/>
-          </a:bodyPr>
+          <a:bodyPr/>
           <a:p/>
         </p:txBody>
       </p:sp>
@@ -3909,9 +3785,7 @@
           <a:ln/>
         </p:spPr>
         <p:txBody>
-          <a:bodyPr wrap="square" rtlCol="0" anchor="ctr">
-            <a:normAutofit/>
-          </a:bodyPr>
+          <a:bodyPr wrap="square" rtlCol="0" anchor="ctr"/>
           <a:lstStyle/>
           <a:p>
             <a:pPr indent="0" marL="0">
@@ -3950,9 +3824,7 @@
           <a:ln/>
         </p:spPr>
         <p:txBody>
-          <a:bodyPr wrap="square" rtlCol="0" anchor="t">
-            <a:normAutofit/>
-          </a:bodyPr>
+          <a:bodyPr wrap="square" rtlCol="0" anchor="t"/>
           <a:lstStyle/>
           <a:p>
             <a:pPr indent="0" marL="0">
@@ -4136,9 +4008,7 @@
           </a:ln>
         </p:spPr>
         <p:txBody>
-          <a:bodyPr wrap="square">
-            <a:normAutofit/>
-          </a:bodyPr>
+          <a:bodyPr/>
           <a:p/>
         </p:txBody>
       </p:sp>
@@ -4160,9 +4030,7 @@
           <a:ln/>
         </p:spPr>
         <p:txBody>
-          <a:bodyPr wrap="square" rtlCol="0" anchor="ctr">
-            <a:normAutofit/>
-          </a:bodyPr>
+          <a:bodyPr wrap="square" rtlCol="0" anchor="ctr"/>
           <a:lstStyle/>
           <a:p>
             <a:pPr indent="0" marL="0">
@@ -4201,9 +4069,7 @@
           <a:ln/>
         </p:spPr>
         <p:txBody>
-          <a:bodyPr wrap="square" rtlCol="0" anchor="t">
-            <a:normAutofit/>
-          </a:bodyPr>
+          <a:bodyPr wrap="square" rtlCol="0" anchor="t"/>
           <a:lstStyle/>
           <a:p>
             <a:pPr indent="0" marL="0">
@@ -4378,9 +4244,7 @@
           <a:ln/>
         </p:spPr>
         <p:txBody>
-          <a:bodyPr wrap="square" rtlCol="0" anchor="ctr">
-            <a:normAutofit/>
-          </a:bodyPr>
+          <a:bodyPr wrap="square" rtlCol="0" anchor="ctr"/>
           <a:lstStyle/>
           <a:p>
             <a:pPr algn="r" indent="0" marL="0">
@@ -4451,9 +4315,7 @@
           </a:ln>
         </p:spPr>
         <p:txBody>
-          <a:bodyPr wrap="square">
-            <a:normAutofit/>
-          </a:bodyPr>
+          <a:bodyPr/>
           <a:p/>
         </p:txBody>
       </p:sp>
@@ -4482,9 +4344,7 @@
           </a:ln>
         </p:spPr>
         <p:txBody>
-          <a:bodyPr wrap="square">
-            <a:normAutofit/>
-          </a:bodyPr>
+          <a:bodyPr/>
           <a:p/>
         </p:txBody>
       </p:sp>
@@ -4515,9 +4375,7 @@
           </a:ln>
         </p:spPr>
         <p:txBody>
-          <a:bodyPr wrap="square">
-            <a:normAutofit/>
-          </a:bodyPr>
+          <a:bodyPr/>
           <a:p/>
         </p:txBody>
       </p:sp>
@@ -4539,9 +4397,7 @@
           <a:ln/>
         </p:spPr>
         <p:txBody>
-          <a:bodyPr wrap="square" rtlCol="0" anchor="ctr">
-            <a:normAutofit/>
-          </a:bodyPr>
+          <a:bodyPr wrap="square" rtlCol="0" anchor="ctr"/>
           <a:lstStyle/>
           <a:p>
             <a:pPr algn="ctr" indent="0" marL="0">
@@ -4580,9 +4436,7 @@
           <a:ln/>
         </p:spPr>
         <p:txBody>
-          <a:bodyPr wrap="square" rtlCol="0" anchor="ctr">
-            <a:normAutofit/>
-          </a:bodyPr>
+          <a:bodyPr wrap="square" rtlCol="0" anchor="ctr"/>
           <a:lstStyle/>
           <a:p>
             <a:pPr indent="0" marL="0">
@@ -4621,9 +4475,7 @@
           <a:ln/>
         </p:spPr>
         <p:txBody>
-          <a:bodyPr wrap="square" rtlCol="0" anchor="ctr">
-            <a:normAutofit/>
-          </a:bodyPr>
+          <a:bodyPr wrap="square" rtlCol="0" anchor="ctr"/>
           <a:lstStyle/>
           <a:p>
             <a:pPr indent="0" marL="0">
@@ -4671,9 +4523,7 @@
           </a:ln>
         </p:spPr>
         <p:txBody>
-          <a:bodyPr wrap="square">
-            <a:normAutofit/>
-          </a:bodyPr>
+          <a:bodyPr/>
           <a:p/>
         </p:txBody>
       </p:sp>
@@ -4695,9 +4545,7 @@
           <a:ln/>
         </p:spPr>
         <p:txBody>
-          <a:bodyPr wrap="square" rtlCol="0" anchor="ctr">
-            <a:normAutofit/>
-          </a:bodyPr>
+          <a:bodyPr wrap="square" rtlCol="0" anchor="ctr"/>
           <a:lstStyle/>
           <a:p>
             <a:pPr indent="0" marL="0">
@@ -4736,9 +4584,7 @@
           <a:ln/>
         </p:spPr>
         <p:txBody>
-          <a:bodyPr wrap="square" rtlCol="0" anchor="ctr">
-            <a:normAutofit/>
-          </a:bodyPr>
+          <a:bodyPr wrap="square" rtlCol="0" anchor="ctr"/>
           <a:lstStyle/>
           <a:p>
             <a:pPr indent="0" marL="0">
@@ -4777,9 +4623,7 @@
           <a:ln/>
         </p:spPr>
         <p:txBody>
-          <a:bodyPr wrap="square" rtlCol="0" anchor="t">
-            <a:normAutofit/>
-          </a:bodyPr>
+          <a:bodyPr wrap="square" rtlCol="0" anchor="t"/>
           <a:lstStyle/>
           <a:p>
             <a:pPr indent="0" marL="0">
@@ -4818,9 +4662,7 @@
           <a:ln/>
         </p:spPr>
         <p:txBody>
-          <a:bodyPr wrap="square" rtlCol="0" anchor="ctr">
-            <a:normAutofit/>
-          </a:bodyPr>
+          <a:bodyPr wrap="square" rtlCol="0" anchor="ctr"/>
           <a:lstStyle/>
           <a:p>
             <a:pPr indent="0" marL="0">
@@ -4859,9 +4701,7 @@
           <a:ln/>
         </p:spPr>
         <p:txBody>
-          <a:bodyPr wrap="square" rtlCol="0" anchor="t">
-            <a:normAutofit/>
-          </a:bodyPr>
+          <a:bodyPr wrap="square" rtlCol="0" anchor="t"/>
           <a:lstStyle/>
           <a:p>
             <a:pPr indent="0" marL="0">
@@ -4900,9 +4740,7 @@
           <a:ln/>
         </p:spPr>
         <p:txBody>
-          <a:bodyPr wrap="square" rtlCol="0" anchor="ctr">
-            <a:normAutofit/>
-          </a:bodyPr>
+          <a:bodyPr wrap="square" rtlCol="0" anchor="ctr"/>
           <a:lstStyle/>
           <a:p>
             <a:pPr indent="0" marL="0">
@@ -4941,9 +4779,7 @@
           <a:ln/>
         </p:spPr>
         <p:txBody>
-          <a:bodyPr wrap="square" rtlCol="0" anchor="t">
-            <a:normAutofit/>
-          </a:bodyPr>
+          <a:bodyPr wrap="square" rtlCol="0" anchor="t"/>
           <a:lstStyle/>
           <a:p>
             <a:pPr indent="0" marL="0">
@@ -4991,9 +4827,7 @@
           </a:ln>
         </p:spPr>
         <p:txBody>
-          <a:bodyPr wrap="square">
-            <a:normAutofit/>
-          </a:bodyPr>
+          <a:bodyPr/>
           <a:p/>
         </p:txBody>
       </p:sp>
@@ -5015,9 +4849,7 @@
           <a:ln/>
         </p:spPr>
         <p:txBody>
-          <a:bodyPr wrap="square" rtlCol="0" anchor="ctr">
-            <a:normAutofit/>
-          </a:bodyPr>
+          <a:bodyPr wrap="square" rtlCol="0" anchor="ctr"/>
           <a:lstStyle/>
           <a:p>
             <a:pPr indent="0" marL="0">
@@ -5056,9 +4888,7 @@
           <a:ln/>
         </p:spPr>
         <p:txBody>
-          <a:bodyPr wrap="square" rtlCol="0" anchor="t">
-            <a:normAutofit/>
-          </a:bodyPr>
+          <a:bodyPr wrap="square" rtlCol="0" anchor="t"/>
           <a:lstStyle/>
           <a:p>
             <a:pPr indent="0" marL="0">
@@ -5097,9 +4927,7 @@
           <a:ln/>
         </p:spPr>
         <p:txBody>
-          <a:bodyPr wrap="square" rtlCol="0" anchor="t">
-            <a:normAutofit/>
-          </a:bodyPr>
+          <a:bodyPr wrap="square" rtlCol="0" anchor="t"/>
           <a:lstStyle/>
           <a:p>
             <a:pPr indent="0" marL="0">
@@ -5138,9 +4966,7 @@
           <a:ln/>
         </p:spPr>
         <p:txBody>
-          <a:bodyPr wrap="square" rtlCol="0" anchor="t">
-            <a:normAutofit/>
-          </a:bodyPr>
+          <a:bodyPr wrap="square" rtlCol="0" anchor="t"/>
           <a:lstStyle/>
           <a:p>
             <a:pPr indent="0" marL="0">
@@ -5179,9 +5005,7 @@
           <a:ln/>
         </p:spPr>
         <p:txBody>
-          <a:bodyPr wrap="square" rtlCol="0" anchor="ctr">
-            <a:normAutofit/>
-          </a:bodyPr>
+          <a:bodyPr wrap="square" rtlCol="0" anchor="ctr"/>
           <a:lstStyle/>
           <a:p>
             <a:pPr algn="r" indent="0" marL="0">
@@ -5252,9 +5076,7 @@
           </a:ln>
         </p:spPr>
         <p:txBody>
-          <a:bodyPr wrap="square">
-            <a:normAutofit/>
-          </a:bodyPr>
+          <a:bodyPr/>
           <a:p/>
         </p:txBody>
       </p:sp>
@@ -5283,9 +5105,7 @@
           </a:ln>
         </p:spPr>
         <p:txBody>
-          <a:bodyPr wrap="square">
-            <a:normAutofit/>
-          </a:bodyPr>
+          <a:bodyPr/>
           <a:p/>
         </p:txBody>
       </p:sp>
@@ -5316,9 +5136,7 @@
           </a:ln>
         </p:spPr>
         <p:txBody>
-          <a:bodyPr wrap="square">
-            <a:normAutofit/>
-          </a:bodyPr>
+          <a:bodyPr/>
           <a:p/>
         </p:txBody>
       </p:sp>
@@ -5340,9 +5158,7 @@
           <a:ln/>
         </p:spPr>
         <p:txBody>
-          <a:bodyPr wrap="square" rtlCol="0" anchor="ctr">
-            <a:normAutofit/>
-          </a:bodyPr>
+          <a:bodyPr wrap="square" rtlCol="0" anchor="ctr"/>
           <a:lstStyle/>
           <a:p>
             <a:pPr algn="ctr" indent="0" marL="0">
@@ -5381,9 +5197,7 @@
           <a:ln/>
         </p:spPr>
         <p:txBody>
-          <a:bodyPr wrap="square" rtlCol="0" anchor="ctr">
-            <a:normAutofit/>
-          </a:bodyPr>
+          <a:bodyPr wrap="square" rtlCol="0" anchor="ctr"/>
           <a:lstStyle/>
           <a:p>
             <a:pPr indent="0" marL="0">
@@ -5422,9 +5236,7 @@
           <a:ln/>
         </p:spPr>
         <p:txBody>
-          <a:bodyPr wrap="square" rtlCol="0" anchor="ctr">
-            <a:normAutofit/>
-          </a:bodyPr>
+          <a:bodyPr wrap="square" rtlCol="0" anchor="ctr"/>
           <a:lstStyle/>
           <a:p>
             <a:pPr indent="0" marL="0">
@@ -5472,9 +5284,7 @@
           </a:ln>
         </p:spPr>
         <p:txBody>
-          <a:bodyPr wrap="square">
-            <a:normAutofit/>
-          </a:bodyPr>
+          <a:bodyPr/>
           <a:p/>
         </p:txBody>
       </p:sp>
@@ -5496,9 +5306,7 @@
           <a:ln/>
         </p:spPr>
         <p:txBody>
-          <a:bodyPr wrap="square" rtlCol="0" anchor="ctr">
-            <a:normAutofit/>
-          </a:bodyPr>
+          <a:bodyPr wrap="square" rtlCol="0" anchor="ctr"/>
           <a:lstStyle/>
           <a:p>
             <a:pPr indent="0" marL="0">
@@ -5537,9 +5345,7 @@
           <a:ln/>
         </p:spPr>
         <p:txBody>
-          <a:bodyPr wrap="square" rtlCol="0" anchor="ctr">
-            <a:normAutofit/>
-          </a:bodyPr>
+          <a:bodyPr wrap="square" rtlCol="0" anchor="ctr"/>
           <a:lstStyle/>
           <a:p>
             <a:pPr indent="0" marL="0">
@@ -5578,9 +5384,7 @@
           <a:ln/>
         </p:spPr>
         <p:txBody>
-          <a:bodyPr wrap="square" rtlCol="0" anchor="t">
-            <a:normAutofit/>
-          </a:bodyPr>
+          <a:bodyPr wrap="square" rtlCol="0" anchor="t"/>
           <a:lstStyle/>
           <a:p>
             <a:pPr indent="0" marL="0">
@@ -5619,9 +5423,7 @@
           <a:ln/>
         </p:spPr>
         <p:txBody>
-          <a:bodyPr wrap="square" rtlCol="0" anchor="ctr">
-            <a:normAutofit/>
-          </a:bodyPr>
+          <a:bodyPr wrap="square" rtlCol="0" anchor="ctr"/>
           <a:lstStyle/>
           <a:p>
             <a:pPr indent="0" marL="0">
@@ -5660,9 +5462,7 @@
           <a:ln/>
         </p:spPr>
         <p:txBody>
-          <a:bodyPr wrap="square" rtlCol="0" anchor="t">
-            <a:normAutofit/>
-          </a:bodyPr>
+          <a:bodyPr wrap="square" rtlCol="0" anchor="t"/>
           <a:lstStyle/>
           <a:p>
             <a:pPr indent="0" marL="0">
@@ -5701,9 +5501,7 @@
           <a:ln/>
         </p:spPr>
         <p:txBody>
-          <a:bodyPr wrap="square" rtlCol="0" anchor="ctr">
-            <a:normAutofit/>
-          </a:bodyPr>
+          <a:bodyPr wrap="square" rtlCol="0" anchor="ctr"/>
           <a:lstStyle/>
           <a:p>
             <a:pPr indent="0" marL="0">
@@ -5742,9 +5540,7 @@
           <a:ln/>
         </p:spPr>
         <p:txBody>
-          <a:bodyPr wrap="square" rtlCol="0" anchor="t">
-            <a:normAutofit/>
-          </a:bodyPr>
+          <a:bodyPr wrap="square" rtlCol="0" anchor="t"/>
           <a:lstStyle/>
           <a:p>
             <a:pPr indent="0" marL="0">
@@ -5792,9 +5588,7 @@
           </a:ln>
         </p:spPr>
         <p:txBody>
-          <a:bodyPr wrap="square">
-            <a:normAutofit/>
-          </a:bodyPr>
+          <a:bodyPr/>
           <a:p/>
         </p:txBody>
       </p:sp>
@@ -5816,9 +5610,7 @@
           <a:ln/>
         </p:spPr>
         <p:txBody>
-          <a:bodyPr wrap="square" rtlCol="0" anchor="ctr">
-            <a:normAutofit/>
-          </a:bodyPr>
+          <a:bodyPr wrap="square" rtlCol="0" anchor="ctr"/>
           <a:lstStyle/>
           <a:p>
             <a:pPr indent="0" marL="0">
@@ -5857,9 +5649,7 @@
           <a:ln/>
         </p:spPr>
         <p:txBody>
-          <a:bodyPr wrap="square" rtlCol="0" anchor="t">
-            <a:normAutofit/>
-          </a:bodyPr>
+          <a:bodyPr wrap="square" rtlCol="0" anchor="t"/>
           <a:lstStyle/>
           <a:p>
             <a:pPr indent="0" marL="0">
@@ -5898,9 +5688,7 @@
           <a:ln/>
         </p:spPr>
         <p:txBody>
-          <a:bodyPr wrap="square" rtlCol="0" anchor="t">
-            <a:normAutofit/>
-          </a:bodyPr>
+          <a:bodyPr wrap="square" rtlCol="0" anchor="t"/>
           <a:lstStyle/>
           <a:p>
             <a:pPr indent="0" marL="0">
@@ -5939,9 +5727,7 @@
           <a:ln/>
         </p:spPr>
         <p:txBody>
-          <a:bodyPr wrap="square" rtlCol="0" anchor="t">
-            <a:normAutofit/>
-          </a:bodyPr>
+          <a:bodyPr wrap="square" rtlCol="0" anchor="t"/>
           <a:lstStyle/>
           <a:p>
             <a:pPr indent="0" marL="0">
@@ -5980,9 +5766,7 @@
           <a:ln/>
         </p:spPr>
         <p:txBody>
-          <a:bodyPr wrap="square" rtlCol="0" anchor="ctr">
-            <a:normAutofit/>
-          </a:bodyPr>
+          <a:bodyPr wrap="square" rtlCol="0" anchor="ctr"/>
           <a:lstStyle/>
           <a:p>
             <a:pPr algn="r" indent="0" marL="0">
@@ -6053,9 +5837,7 @@
           </a:ln>
         </p:spPr>
         <p:txBody>
-          <a:bodyPr wrap="square">
-            <a:normAutofit/>
-          </a:bodyPr>
+          <a:bodyPr/>
           <a:p/>
         </p:txBody>
       </p:sp>
@@ -6084,9 +5866,7 @@
           </a:ln>
         </p:spPr>
         <p:txBody>
-          <a:bodyPr wrap="square">
-            <a:normAutofit/>
-          </a:bodyPr>
+          <a:bodyPr/>
           <a:p/>
         </p:txBody>
       </p:sp>
@@ -6117,9 +5897,7 @@
           </a:ln>
         </p:spPr>
         <p:txBody>
-          <a:bodyPr wrap="square">
-            <a:normAutofit/>
-          </a:bodyPr>
+          <a:bodyPr/>
           <a:p/>
         </p:txBody>
       </p:sp>
@@ -6141,9 +5919,7 @@
           <a:ln/>
         </p:spPr>
         <p:txBody>
-          <a:bodyPr wrap="square" rtlCol="0" anchor="ctr">
-            <a:normAutofit/>
-          </a:bodyPr>
+          <a:bodyPr wrap="square" rtlCol="0" anchor="ctr"/>
           <a:lstStyle/>
           <a:p>
             <a:pPr algn="ctr" indent="0" marL="0">
@@ -6182,9 +5958,7 @@
           <a:ln/>
         </p:spPr>
         <p:txBody>
-          <a:bodyPr wrap="square" rtlCol="0" anchor="ctr">
-            <a:normAutofit/>
-          </a:bodyPr>
+          <a:bodyPr wrap="square" rtlCol="0" anchor="ctr"/>
           <a:lstStyle/>
           <a:p>
             <a:pPr indent="0" marL="0">
@@ -6223,9 +5997,7 @@
           <a:ln/>
         </p:spPr>
         <p:txBody>
-          <a:bodyPr wrap="square" rtlCol="0" anchor="ctr">
-            <a:normAutofit/>
-          </a:bodyPr>
+          <a:bodyPr wrap="square" rtlCol="0" anchor="ctr"/>
           <a:lstStyle/>
           <a:p>
             <a:pPr indent="0" marL="0">
@@ -6273,9 +6045,7 @@
           </a:ln>
         </p:spPr>
         <p:txBody>
-          <a:bodyPr wrap="square">
-            <a:normAutofit/>
-          </a:bodyPr>
+          <a:bodyPr/>
           <a:p/>
         </p:txBody>
       </p:sp>
@@ -6297,9 +6067,7 @@
           <a:ln/>
         </p:spPr>
         <p:txBody>
-          <a:bodyPr wrap="square" rtlCol="0" anchor="ctr">
-            <a:normAutofit/>
-          </a:bodyPr>
+          <a:bodyPr wrap="square" rtlCol="0" anchor="ctr"/>
           <a:lstStyle/>
           <a:p>
             <a:pPr indent="0" marL="0">
@@ -6338,9 +6106,7 @@
           <a:ln/>
         </p:spPr>
         <p:txBody>
-          <a:bodyPr wrap="square" rtlCol="0" anchor="ctr">
-            <a:normAutofit/>
-          </a:bodyPr>
+          <a:bodyPr wrap="square" rtlCol="0" anchor="ctr"/>
           <a:lstStyle/>
           <a:p>
             <a:pPr indent="0" marL="0">
@@ -6379,9 +6145,7 @@
           <a:ln/>
         </p:spPr>
         <p:txBody>
-          <a:bodyPr wrap="square" rtlCol="0" anchor="t">
-            <a:normAutofit/>
-          </a:bodyPr>
+          <a:bodyPr wrap="square" rtlCol="0" anchor="t"/>
           <a:lstStyle/>
           <a:p>
             <a:pPr indent="0" marL="0">
@@ -6420,9 +6184,7 @@
           <a:ln/>
         </p:spPr>
         <p:txBody>
-          <a:bodyPr wrap="square" rtlCol="0" anchor="ctr">
-            <a:normAutofit/>
-          </a:bodyPr>
+          <a:bodyPr wrap="square" rtlCol="0" anchor="ctr"/>
           <a:lstStyle/>
           <a:p>
             <a:pPr indent="0" marL="0">
@@ -6461,9 +6223,7 @@
           <a:ln/>
         </p:spPr>
         <p:txBody>
-          <a:bodyPr wrap="square" rtlCol="0" anchor="t">
-            <a:normAutofit/>
-          </a:bodyPr>
+          <a:bodyPr wrap="square" rtlCol="0" anchor="t"/>
           <a:lstStyle/>
           <a:p>
             <a:pPr indent="0" marL="0">
@@ -6502,9 +6262,7 @@
           <a:ln/>
         </p:spPr>
         <p:txBody>
-          <a:bodyPr wrap="square" rtlCol="0" anchor="ctr">
-            <a:normAutofit/>
-          </a:bodyPr>
+          <a:bodyPr wrap="square" rtlCol="0" anchor="ctr"/>
           <a:lstStyle/>
           <a:p>
             <a:pPr indent="0" marL="0">
@@ -6543,9 +6301,7 @@
           <a:ln/>
         </p:spPr>
         <p:txBody>
-          <a:bodyPr wrap="square" rtlCol="0" anchor="t">
-            <a:normAutofit/>
-          </a:bodyPr>
+          <a:bodyPr wrap="square" rtlCol="0" anchor="t"/>
           <a:lstStyle/>
           <a:p>
             <a:pPr indent="0" marL="0">
@@ -6593,9 +6349,7 @@
           </a:ln>
         </p:spPr>
         <p:txBody>
-          <a:bodyPr wrap="square">
-            <a:normAutofit/>
-          </a:bodyPr>
+          <a:bodyPr/>
           <a:p/>
         </p:txBody>
       </p:sp>
@@ -6617,9 +6371,7 @@
           <a:ln/>
         </p:spPr>
         <p:txBody>
-          <a:bodyPr wrap="square" rtlCol="0" anchor="ctr">
-            <a:normAutofit/>
-          </a:bodyPr>
+          <a:bodyPr wrap="square" rtlCol="0" anchor="ctr"/>
           <a:lstStyle/>
           <a:p>
             <a:pPr indent="0" marL="0">
@@ -6658,9 +6410,7 @@
           <a:ln/>
         </p:spPr>
         <p:txBody>
-          <a:bodyPr wrap="square" rtlCol="0" anchor="t">
-            <a:normAutofit/>
-          </a:bodyPr>
+          <a:bodyPr wrap="square" rtlCol="0" anchor="t"/>
           <a:lstStyle/>
           <a:p>
             <a:pPr indent="0" marL="0">
@@ -6699,9 +6449,7 @@
           <a:ln/>
         </p:spPr>
         <p:txBody>
-          <a:bodyPr wrap="square" rtlCol="0" anchor="t">
-            <a:normAutofit/>
-          </a:bodyPr>
+          <a:bodyPr wrap="square" rtlCol="0" anchor="t"/>
           <a:lstStyle/>
           <a:p>
             <a:pPr indent="0" marL="0">
@@ -6740,9 +6488,7 @@
           <a:ln/>
         </p:spPr>
         <p:txBody>
-          <a:bodyPr wrap="square" rtlCol="0" anchor="t">
-            <a:normAutofit/>
-          </a:bodyPr>
+          <a:bodyPr wrap="square" rtlCol="0" anchor="t"/>
           <a:lstStyle/>
           <a:p>
             <a:pPr indent="0" marL="0">
@@ -6781,9 +6527,7 @@
           <a:ln/>
         </p:spPr>
         <p:txBody>
-          <a:bodyPr wrap="square" rtlCol="0" anchor="ctr">
-            <a:normAutofit/>
-          </a:bodyPr>
+          <a:bodyPr wrap="square" rtlCol="0" anchor="ctr"/>
           <a:lstStyle/>
           <a:p>
             <a:pPr algn="r" indent="0" marL="0">
@@ -6854,9 +6598,7 @@
           </a:ln>
         </p:spPr>
         <p:txBody>
-          <a:bodyPr wrap="square">
-            <a:normAutofit/>
-          </a:bodyPr>
+          <a:bodyPr/>
           <a:p/>
         </p:txBody>
       </p:sp>
@@ -6885,9 +6627,7 @@
           </a:ln>
         </p:spPr>
         <p:txBody>
-          <a:bodyPr wrap="square">
-            <a:normAutofit/>
-          </a:bodyPr>
+          <a:bodyPr/>
           <a:p/>
         </p:txBody>
       </p:sp>
@@ -6909,9 +6649,7 @@
           <a:ln/>
         </p:spPr>
         <p:txBody>
-          <a:bodyPr wrap="square" rtlCol="0" anchor="ctr">
-            <a:normAutofit/>
-          </a:bodyPr>
+          <a:bodyPr wrap="square" rtlCol="0" anchor="ctr"/>
           <a:lstStyle/>
           <a:p>
             <a:pPr indent="0" marL="0">
@@ -6950,9 +6688,7 @@
           <a:ln/>
         </p:spPr>
         <p:txBody>
-          <a:bodyPr wrap="square" rtlCol="0" anchor="ctr">
-            <a:normAutofit/>
-          </a:bodyPr>
+          <a:bodyPr wrap="square" rtlCol="0" anchor="ctr"/>
           <a:lstStyle/>
           <a:p>
             <a:pPr algn="ctr" indent="0" marL="0">
@@ -6991,9 +6727,7 @@
           <a:ln/>
         </p:spPr>
         <p:txBody>
-          <a:bodyPr wrap="square" rtlCol="0" anchor="ctr">
-            <a:normAutofit/>
-          </a:bodyPr>
+          <a:bodyPr wrap="square" rtlCol="0" anchor="ctr"/>
           <a:lstStyle/>
           <a:p>
             <a:pPr algn="ctr" indent="0" marL="0">
@@ -7041,9 +6775,7 @@
           </a:ln>
         </p:spPr>
         <p:txBody>
-          <a:bodyPr wrap="square">
-            <a:normAutofit/>
-          </a:bodyPr>
+          <a:bodyPr/>
           <a:p/>
         </p:txBody>
       </p:sp>
@@ -7072,9 +6804,7 @@
           </a:ln>
         </p:spPr>
         <p:txBody>
-          <a:bodyPr wrap="square">
-            <a:normAutofit/>
-          </a:bodyPr>
+          <a:bodyPr/>
           <a:p/>
         </p:txBody>
       </p:sp>
@@ -7096,9 +6826,7 @@
           <a:ln/>
         </p:spPr>
         <p:txBody>
-          <a:bodyPr wrap="square" rtlCol="0" anchor="ctr">
-            <a:normAutofit/>
-          </a:bodyPr>
+          <a:bodyPr wrap="square" rtlCol="0" anchor="ctr"/>
           <a:lstStyle/>
           <a:p>
             <a:pPr algn="ctr" indent="0" marL="0">
@@ -7137,9 +6865,7 @@
           <a:ln/>
         </p:spPr>
         <p:txBody>
-          <a:bodyPr wrap="square" rtlCol="0" anchor="ctr">
-            <a:normAutofit/>
-          </a:bodyPr>
+          <a:bodyPr wrap="square" rtlCol="0" anchor="ctr"/>
           <a:lstStyle/>
           <a:p>
             <a:pPr indent="0" marL="0">
@@ -7178,9 +6904,7 @@
           <a:ln/>
         </p:spPr>
         <p:txBody>
-          <a:bodyPr wrap="square" rtlCol="0" anchor="ctr">
-            <a:normAutofit/>
-          </a:bodyPr>
+          <a:bodyPr wrap="square" rtlCol="0" anchor="ctr"/>
           <a:lstStyle/>
           <a:p>
             <a:pPr indent="0" marL="0">
@@ -7228,9 +6952,7 @@
           </a:ln>
         </p:spPr>
         <p:txBody>
-          <a:bodyPr wrap="square">
-            <a:normAutofit/>
-          </a:bodyPr>
+          <a:bodyPr/>
           <a:p/>
         </p:txBody>
       </p:sp>
@@ -7259,9 +6981,7 @@
           </a:ln>
         </p:spPr>
         <p:txBody>
-          <a:bodyPr wrap="square">
-            <a:normAutofit/>
-          </a:bodyPr>
+          <a:bodyPr/>
           <a:p/>
         </p:txBody>
       </p:sp>
@@ -7283,9 +7003,7 @@
           <a:ln/>
         </p:spPr>
         <p:txBody>
-          <a:bodyPr wrap="square" rtlCol="0" anchor="ctr">
-            <a:normAutofit/>
-          </a:bodyPr>
+          <a:bodyPr wrap="square" rtlCol="0" anchor="ctr"/>
           <a:lstStyle/>
           <a:p>
             <a:pPr algn="ctr" indent="0" marL="0">
@@ -7324,9 +7042,7 @@
           <a:ln/>
         </p:spPr>
         <p:txBody>
-          <a:bodyPr wrap="square" rtlCol="0" anchor="ctr">
-            <a:normAutofit/>
-          </a:bodyPr>
+          <a:bodyPr wrap="square" rtlCol="0" anchor="ctr"/>
           <a:lstStyle/>
           <a:p>
             <a:pPr indent="0" marL="0">
@@ -7365,9 +7081,7 @@
           <a:ln/>
         </p:spPr>
         <p:txBody>
-          <a:bodyPr wrap="square" rtlCol="0" anchor="ctr">
-            <a:normAutofit/>
-          </a:bodyPr>
+          <a:bodyPr wrap="square" rtlCol="0" anchor="ctr"/>
           <a:lstStyle/>
           <a:p>
             <a:pPr indent="0" marL="0">
@@ -7415,9 +7129,7 @@
           </a:ln>
         </p:spPr>
         <p:txBody>
-          <a:bodyPr wrap="square">
-            <a:normAutofit/>
-          </a:bodyPr>
+          <a:bodyPr/>
           <a:p/>
         </p:txBody>
       </p:sp>
@@ -7446,9 +7158,7 @@
           </a:ln>
         </p:spPr>
         <p:txBody>
-          <a:bodyPr wrap="square">
-            <a:normAutofit/>
-          </a:bodyPr>
+          <a:bodyPr/>
           <a:p/>
         </p:txBody>
       </p:sp>
@@ -7470,9 +7180,7 @@
           <a:ln/>
         </p:spPr>
         <p:txBody>
-          <a:bodyPr wrap="square" rtlCol="0" anchor="ctr">
-            <a:normAutofit/>
-          </a:bodyPr>
+          <a:bodyPr wrap="square" rtlCol="0" anchor="ctr"/>
           <a:lstStyle/>
           <a:p>
             <a:pPr algn="ctr" indent="0" marL="0">
@@ -7511,9 +7219,7 @@
           <a:ln/>
         </p:spPr>
         <p:txBody>
-          <a:bodyPr wrap="square" rtlCol="0" anchor="ctr">
-            <a:normAutofit/>
-          </a:bodyPr>
+          <a:bodyPr wrap="square" rtlCol="0" anchor="ctr"/>
           <a:lstStyle/>
           <a:p>
             <a:pPr indent="0" marL="0">
@@ -7552,9 +7258,7 @@
           <a:ln/>
         </p:spPr>
         <p:txBody>
-          <a:bodyPr wrap="square" rtlCol="0" anchor="ctr">
-            <a:normAutofit/>
-          </a:bodyPr>
+          <a:bodyPr wrap="square" rtlCol="0" anchor="ctr"/>
           <a:lstStyle/>
           <a:p>
             <a:pPr indent="0" marL="0">
@@ -7593,9 +7297,7 @@
           <a:ln/>
         </p:spPr>
         <p:txBody>
-          <a:bodyPr wrap="square" rtlCol="0" anchor="ctr">
-            <a:normAutofit/>
-          </a:bodyPr>
+          <a:bodyPr wrap="square" rtlCol="0" anchor="ctr"/>
           <a:lstStyle/>
           <a:p>
             <a:pPr algn="r" indent="0" marL="0">
